--- a/MASTER_보장분석지_PPT_빈폼.pptx
+++ b/MASTER_보장분석지_PPT_빈폼.pptx
@@ -5,7 +5,7 @@
     <p:sldMasterId id="2147483660" r:id="rId1"/>
   </p:sldMasterIdLst>
   <p:sldIdLst>
-    <p:sldId id="258" r:id="rId10"/>
+    <p:sldId id="258" r:id="rId2"/>
   </p:sldIdLst>
   <p:sldSz cx="6858000" cy="9906000" type="A4"/>
   <p:notesSz cx="10018713" cy="14447838"/>
@@ -243,7 +243,7 @@
           <a:p>
             <a:fld id="{9D5F825C-5304-4128-8698-8A30172550A0}" type="datetimeFigureOut">
               <a:rPr lang="ko-KR" altLang="en-US" smtClean="0"/>
-              <a:t>2026-03-08</a:t>
+              <a:t>2026-01-24</a:t>
             </a:fld>
             <a:endParaRPr lang="ko-KR" altLang="en-US"/>
           </a:p>
@@ -413,7 +413,7 @@
           <a:p>
             <a:fld id="{9D5F825C-5304-4128-8698-8A30172550A0}" type="datetimeFigureOut">
               <a:rPr lang="ko-KR" altLang="en-US" smtClean="0"/>
-              <a:t>2026-03-08</a:t>
+              <a:t>2026-01-24</a:t>
             </a:fld>
             <a:endParaRPr lang="ko-KR" altLang="en-US"/>
           </a:p>
@@ -593,7 +593,7 @@
           <a:p>
             <a:fld id="{9D5F825C-5304-4128-8698-8A30172550A0}" type="datetimeFigureOut">
               <a:rPr lang="ko-KR" altLang="en-US" smtClean="0"/>
-              <a:t>2026-03-08</a:t>
+              <a:t>2026-01-24</a:t>
             </a:fld>
             <a:endParaRPr lang="ko-KR" altLang="en-US"/>
           </a:p>
@@ -763,7 +763,7 @@
           <a:p>
             <a:fld id="{9D5F825C-5304-4128-8698-8A30172550A0}" type="datetimeFigureOut">
               <a:rPr lang="ko-KR" altLang="en-US" smtClean="0"/>
-              <a:t>2026-03-08</a:t>
+              <a:t>2026-01-24</a:t>
             </a:fld>
             <a:endParaRPr lang="ko-KR" altLang="en-US"/>
           </a:p>
@@ -1009,7 +1009,7 @@
           <a:p>
             <a:fld id="{9D5F825C-5304-4128-8698-8A30172550A0}" type="datetimeFigureOut">
               <a:rPr lang="ko-KR" altLang="en-US" smtClean="0"/>
-              <a:t>2026-03-08</a:t>
+              <a:t>2026-01-24</a:t>
             </a:fld>
             <a:endParaRPr lang="ko-KR" altLang="en-US"/>
           </a:p>
@@ -1241,7 +1241,7 @@
           <a:p>
             <a:fld id="{9D5F825C-5304-4128-8698-8A30172550A0}" type="datetimeFigureOut">
               <a:rPr lang="ko-KR" altLang="en-US" smtClean="0"/>
-              <a:t>2026-03-08</a:t>
+              <a:t>2026-01-24</a:t>
             </a:fld>
             <a:endParaRPr lang="ko-KR" altLang="en-US"/>
           </a:p>
@@ -1608,7 +1608,7 @@
           <a:p>
             <a:fld id="{9D5F825C-5304-4128-8698-8A30172550A0}" type="datetimeFigureOut">
               <a:rPr lang="ko-KR" altLang="en-US" smtClean="0"/>
-              <a:t>2026-03-08</a:t>
+              <a:t>2026-01-24</a:t>
             </a:fld>
             <a:endParaRPr lang="ko-KR" altLang="en-US"/>
           </a:p>
@@ -1726,7 +1726,7 @@
           <a:p>
             <a:fld id="{9D5F825C-5304-4128-8698-8A30172550A0}" type="datetimeFigureOut">
               <a:rPr lang="ko-KR" altLang="en-US" smtClean="0"/>
-              <a:t>2026-03-08</a:t>
+              <a:t>2026-01-24</a:t>
             </a:fld>
             <a:endParaRPr lang="ko-KR" altLang="en-US"/>
           </a:p>
@@ -1821,7 +1821,7 @@
           <a:p>
             <a:fld id="{9D5F825C-5304-4128-8698-8A30172550A0}" type="datetimeFigureOut">
               <a:rPr lang="ko-KR" altLang="en-US" smtClean="0"/>
-              <a:t>2026-03-08</a:t>
+              <a:t>2026-01-24</a:t>
             </a:fld>
             <a:endParaRPr lang="ko-KR" altLang="en-US"/>
           </a:p>
@@ -2098,7 +2098,7 @@
           <a:p>
             <a:fld id="{9D5F825C-5304-4128-8698-8A30172550A0}" type="datetimeFigureOut">
               <a:rPr lang="ko-KR" altLang="en-US" smtClean="0"/>
-              <a:t>2026-03-08</a:t>
+              <a:t>2026-01-24</a:t>
             </a:fld>
             <a:endParaRPr lang="ko-KR" altLang="en-US"/>
           </a:p>
@@ -2355,7 +2355,7 @@
           <a:p>
             <a:fld id="{9D5F825C-5304-4128-8698-8A30172550A0}" type="datetimeFigureOut">
               <a:rPr lang="ko-KR" altLang="en-US" smtClean="0"/>
-              <a:t>2026-03-08</a:t>
+              <a:t>2026-01-24</a:t>
             </a:fld>
             <a:endParaRPr lang="ko-KR" altLang="en-US"/>
           </a:p>
@@ -2568,7 +2568,7 @@
           <a:p>
             <a:fld id="{9D5F825C-5304-4128-8698-8A30172550A0}" type="datetimeFigureOut">
               <a:rPr lang="ko-KR" altLang="en-US" smtClean="0"/>
-              <a:t>2026-03-08</a:t>
+              <a:t>2026-01-24</a:t>
             </a:fld>
             <a:endParaRPr lang="ko-KR" altLang="en-US"/>
           </a:p>
@@ -2956,7 +2956,7 @@
 </p:sldMaster>
 </file>
 
-<file path=ppt/slides/slide9.xml><?xml version="1.0" encoding="utf-8"?>
+<file path=ppt/slides/slide1.xml><?xml version="1.0" encoding="utf-8"?>
 <p:sld xmlns:a="http://schemas.openxmlformats.org/drawingml/2006/main" xmlns:r="http://schemas.openxmlformats.org/officeDocument/2006/relationships" xmlns:p="http://schemas.openxmlformats.org/presentationml/2006/main">
   <p:cSld>
     <p:spTree>
@@ -2982,9 +2982,7 @@
               </a:ext>
             </a:extLst>
           </p:cNvPr>
-          <p:cNvSpPr>
-            <a:spLocks noGrp="1" noRot="1" noMove="1" noResize="1" noEditPoints="1" noAdjustHandles="1" noChangeArrowheads="1" noChangeShapeType="1"/>
-          </p:cNvSpPr>
+          <p:cNvSpPr/>
           <p:nvPr/>
         </p:nvSpPr>
         <p:spPr>
@@ -3045,9 +3043,7 @@
               </a:ext>
             </a:extLst>
           </p:cNvPr>
-          <p:cNvSpPr>
-            <a:spLocks noGrp="1" noRot="1" noMove="1" noResize="1" noEditPoints="1" noAdjustHandles="1" noChangeArrowheads="1" noChangeShapeType="1"/>
-          </p:cNvSpPr>
+          <p:cNvSpPr/>
           <p:nvPr/>
         </p:nvSpPr>
         <p:spPr>
@@ -3108,9 +3104,7 @@
               </a:ext>
             </a:extLst>
           </p:cNvPr>
-          <p:cNvSpPr>
-            <a:spLocks noGrp="1" noRot="1" noMove="1" noResize="1" noEditPoints="1" noAdjustHandles="1" noChangeArrowheads="1" noChangeShapeType="1"/>
-          </p:cNvSpPr>
+          <p:cNvSpPr/>
           <p:nvPr/>
         </p:nvSpPr>
         <p:spPr>
@@ -3171,9 +3165,7 @@
               </a:ext>
             </a:extLst>
           </p:cNvPr>
-          <p:cNvSpPr>
-            <a:spLocks noGrp="1" noRot="1" noMove="1" noResize="1" noEditPoints="1" noAdjustHandles="1" noChangeArrowheads="1" noChangeShapeType="1"/>
-          </p:cNvSpPr>
+          <p:cNvSpPr/>
           <p:nvPr/>
         </p:nvSpPr>
         <p:spPr>
@@ -3224,9 +3216,7 @@
               </a:ext>
             </a:extLst>
           </p:cNvPr>
-          <p:cNvSpPr>
-            <a:spLocks noGrp="1" noRot="1" noMove="1" noResize="1" noEditPoints="1" noAdjustHandles="1" noChangeArrowheads="1" noChangeShapeType="1"/>
-          </p:cNvSpPr>
+          <p:cNvSpPr/>
           <p:nvPr/>
         </p:nvSpPr>
         <p:spPr>
@@ -3277,9 +3267,7 @@
               </a:ext>
             </a:extLst>
           </p:cNvPr>
-          <p:cNvSpPr>
-            <a:spLocks noGrp="1" noRot="1" noMove="1" noResize="1" noEditPoints="1" noAdjustHandles="1" noChangeArrowheads="1" noChangeShapeType="1"/>
-          </p:cNvSpPr>
+          <p:cNvSpPr/>
           <p:nvPr/>
         </p:nvSpPr>
         <p:spPr>
@@ -3330,9 +3318,7 @@
               </a:ext>
             </a:extLst>
           </p:cNvPr>
-          <p:cNvSpPr>
-            <a:spLocks noGrp="1" noRot="1" noMove="1" noResize="1" noEditPoints="1" noAdjustHandles="1" noChangeArrowheads="1" noChangeShapeType="1"/>
-          </p:cNvSpPr>
+          <p:cNvSpPr/>
           <p:nvPr/>
         </p:nvSpPr>
         <p:spPr>
@@ -3383,9 +3369,7 @@
               </a:ext>
             </a:extLst>
           </p:cNvPr>
-          <p:cNvSpPr txBox="1">
-            <a:spLocks noGrp="1" noRot="1" noMove="1" noResize="1" noEditPoints="1" noAdjustHandles="1" noChangeArrowheads="1" noChangeShapeType="1"/>
-          </p:cNvSpPr>
+          <p:cNvSpPr txBox="1"/>
           <p:nvPr/>
         </p:nvSpPr>
         <p:spPr>
@@ -3435,7 +3419,7 @@
             </a:extLst>
           </p:cNvPr>
           <p:cNvCxnSpPr>
-            <a:cxnSpLocks noGrp="1" noRot="1" noMove="1" noResize="1" noEditPoints="1" noAdjustHandles="1" noChangeArrowheads="1" noChangeShapeType="1"/>
+            <a:cxnSpLocks/>
           </p:cNvCxnSpPr>
           <p:nvPr/>
         </p:nvCxnSpPr>
@@ -3478,7 +3462,7 @@
             </a:extLst>
           </p:cNvPr>
           <p:cNvCxnSpPr>
-            <a:cxnSpLocks noGrp="1" noRot="1" noMove="1" noResize="1" noEditPoints="1" noAdjustHandles="1" noChangeArrowheads="1" noChangeShapeType="1"/>
+            <a:cxnSpLocks/>
           </p:cNvCxnSpPr>
           <p:nvPr/>
         </p:nvCxnSpPr>
@@ -3521,7 +3505,7 @@
             </a:extLst>
           </p:cNvPr>
           <p:cNvCxnSpPr>
-            <a:cxnSpLocks noGrp="1" noRot="1" noMove="1" noResize="1" noEditPoints="1" noAdjustHandles="1" noChangeArrowheads="1" noChangeShapeType="1"/>
+            <a:cxnSpLocks/>
           </p:cNvCxnSpPr>
           <p:nvPr/>
         </p:nvCxnSpPr>
@@ -3563,9 +3547,7 @@
               </a:ext>
             </a:extLst>
           </p:cNvPr>
-          <p:cNvSpPr txBox="1">
-            <a:spLocks noGrp="1" noRot="1" noMove="1" noResize="1" noEditPoints="1" noAdjustHandles="1" noChangeArrowheads="1" noChangeShapeType="1"/>
-          </p:cNvSpPr>
+          <p:cNvSpPr txBox="1"/>
           <p:nvPr/>
         </p:nvSpPr>
         <p:spPr>
@@ -3604,7 +3586,7 @@
             </a:extLst>
           </p:cNvPr>
           <p:cNvCxnSpPr>
-            <a:cxnSpLocks noGrp="1" noRot="1" noMove="1" noResize="1" noEditPoints="1" noAdjustHandles="1" noChangeArrowheads="1" noChangeShapeType="1"/>
+            <a:cxnSpLocks/>
           </p:cNvCxnSpPr>
           <p:nvPr/>
         </p:nvCxnSpPr>
@@ -3646,9 +3628,7 @@
               </a:ext>
             </a:extLst>
           </p:cNvPr>
-          <p:cNvSpPr txBox="1">
-            <a:spLocks noGrp="1" noRot="1" noMove="1" noResize="1" noEditPoints="1" noAdjustHandles="1" noChangeArrowheads="1" noChangeShapeType="1"/>
-          </p:cNvSpPr>
+          <p:cNvSpPr txBox="1"/>
           <p:nvPr/>
         </p:nvSpPr>
         <p:spPr>
@@ -3686,9 +3666,7 @@
               </a:ext>
             </a:extLst>
           </p:cNvPr>
-          <p:cNvSpPr txBox="1">
-            <a:spLocks noGrp="1" noRot="1" noMove="1" noResize="1" noEditPoints="1" noAdjustHandles="1" noChangeArrowheads="1" noChangeShapeType="1"/>
-          </p:cNvSpPr>
+          <p:cNvSpPr txBox="1"/>
           <p:nvPr/>
         </p:nvSpPr>
         <p:spPr>
@@ -3726,9 +3704,7 @@
               </a:ext>
             </a:extLst>
           </p:cNvPr>
-          <p:cNvSpPr txBox="1">
-            <a:spLocks noGrp="1" noRot="1" noMove="1" noResize="1" noEditPoints="1" noAdjustHandles="1" noChangeArrowheads="1" noChangeShapeType="1"/>
-          </p:cNvSpPr>
+          <p:cNvSpPr txBox="1"/>
           <p:nvPr/>
         </p:nvSpPr>
         <p:spPr>
@@ -3804,9 +3780,7 @@
               </a:ext>
             </a:extLst>
           </p:cNvPr>
-          <p:cNvSpPr txBox="1">
-            <a:spLocks noGrp="1" noRot="1" noMove="1" noResize="1" noEditPoints="1" noAdjustHandles="1" noChangeArrowheads="1" noChangeShapeType="1"/>
-          </p:cNvSpPr>
+          <p:cNvSpPr txBox="1"/>
           <p:nvPr/>
         </p:nvSpPr>
         <p:spPr>
@@ -3847,9 +3821,7 @@
               </a:ext>
             </a:extLst>
           </p:cNvPr>
-          <p:cNvSpPr txBox="1">
-            <a:spLocks noGrp="1" noRot="1" noMove="1" noResize="1" noEditPoints="1" noAdjustHandles="1" noChangeArrowheads="1" noChangeShapeType="1"/>
-          </p:cNvSpPr>
+          <p:cNvSpPr txBox="1"/>
           <p:nvPr/>
         </p:nvSpPr>
         <p:spPr>
@@ -3890,9 +3862,7 @@
               </a:ext>
             </a:extLst>
           </p:cNvPr>
-          <p:cNvSpPr txBox="1">
-            <a:spLocks noGrp="1" noRot="1" noMove="1" noResize="1" noEditPoints="1" noAdjustHandles="1" noChangeArrowheads="1" noChangeShapeType="1"/>
-          </p:cNvSpPr>
+          <p:cNvSpPr txBox="1"/>
           <p:nvPr/>
         </p:nvSpPr>
         <p:spPr>
@@ -3933,9 +3903,7 @@
               </a:ext>
             </a:extLst>
           </p:cNvPr>
-          <p:cNvSpPr>
-            <a:spLocks noGrp="1" noRot="1" noMove="1" noResize="1" noEditPoints="1" noAdjustHandles="1" noChangeArrowheads="1" noChangeShapeType="1"/>
-          </p:cNvSpPr>
+          <p:cNvSpPr/>
           <p:nvPr/>
         </p:nvSpPr>
         <p:spPr>
@@ -3996,9 +3964,7 @@
               </a:ext>
             </a:extLst>
           </p:cNvPr>
-          <p:cNvSpPr>
-            <a:spLocks noGrp="1" noRot="1" noMove="1" noResize="1" noEditPoints="1" noAdjustHandles="1" noChangeArrowheads="1" noChangeShapeType="1"/>
-          </p:cNvSpPr>
+          <p:cNvSpPr/>
           <p:nvPr/>
         </p:nvSpPr>
         <p:spPr>
@@ -4059,9 +4025,7 @@
               </a:ext>
             </a:extLst>
           </p:cNvPr>
-          <p:cNvSpPr>
-            <a:spLocks noGrp="1" noRot="1" noMove="1" noResize="1" noEditPoints="1" noAdjustHandles="1" noChangeArrowheads="1" noChangeShapeType="1"/>
-          </p:cNvSpPr>
+          <p:cNvSpPr/>
           <p:nvPr/>
         </p:nvSpPr>
         <p:spPr>
@@ -4122,9 +4086,7 @@
               </a:ext>
             </a:extLst>
           </p:cNvPr>
-          <p:cNvSpPr txBox="1">
-            <a:spLocks noGrp="1" noRot="1" noMove="1" noResize="1" noEditPoints="1" noAdjustHandles="1" noChangeArrowheads="1" noChangeShapeType="1"/>
-          </p:cNvSpPr>
+          <p:cNvSpPr txBox="1"/>
           <p:nvPr/>
         </p:nvSpPr>
         <p:spPr>
@@ -4166,9 +4128,7 @@
               </a:ext>
             </a:extLst>
           </p:cNvPr>
-          <p:cNvSpPr txBox="1">
-            <a:spLocks noGrp="1" noRot="1" noMove="1" noResize="1" noEditPoints="1" noAdjustHandles="1" noChangeArrowheads="1" noChangeShapeType="1"/>
-          </p:cNvSpPr>
+          <p:cNvSpPr txBox="1"/>
           <p:nvPr/>
         </p:nvSpPr>
         <p:spPr>
@@ -4214,9 +4174,7 @@
               </a:ext>
             </a:extLst>
           </p:cNvPr>
-          <p:cNvSpPr txBox="1">
-            <a:spLocks noGrp="1" noRot="1" noMove="1" noResize="1" noEditPoints="1" noAdjustHandles="1" noChangeArrowheads="1" noChangeShapeType="1"/>
-          </p:cNvSpPr>
+          <p:cNvSpPr txBox="1"/>
           <p:nvPr/>
         </p:nvSpPr>
         <p:spPr>
@@ -4258,9 +4216,7 @@
               </a:ext>
             </a:extLst>
           </p:cNvPr>
-          <p:cNvSpPr txBox="1">
-            <a:spLocks noGrp="1" noRot="1" noMove="1" noResize="1" noEditPoints="1" noAdjustHandles="1" noChangeArrowheads="1" noChangeShapeType="1"/>
-          </p:cNvSpPr>
+          <p:cNvSpPr txBox="1"/>
           <p:nvPr/>
         </p:nvSpPr>
         <p:spPr>
@@ -4308,62 +4264,24 @@
                 <a:latin typeface="HY엽서M" panose="02030600000101010101" pitchFamily="18" charset="-127"/>
                 <a:ea typeface="HY엽서M" panose="02030600000101010101" pitchFamily="18" charset="-127"/>
               </a:rPr>
-              <a:t>) : </a:t>
+              <a:t>) :</a:t>
+            </a:r>
+          </a:p>
+          <a:p>
+            <a:r>
+              <a:rPr lang="ko-KR" altLang="en-US" sz="1000" dirty="0">
+                <a:latin typeface="HY엽서M" panose="02030600000101010101" pitchFamily="18" charset="-127"/>
+                <a:ea typeface="HY엽서M" panose="02030600000101010101" pitchFamily="18" charset="-127"/>
+              </a:rPr>
+              <a:t>혈전용해치료비 </a:t>
             </a:r>
             <a:r>
               <a:rPr lang="en-US" altLang="ko-KR" sz="1000" dirty="0">
-                <a:solidFill>
-                  <a:srgbClr val="0000FF"/>
-                </a:solidFill>
-                <a:latin typeface="HY엽서M" panose="02030600000101010101" pitchFamily="18" charset="-127"/>
-                <a:ea typeface="HY엽서M" panose="02030600000101010101" pitchFamily="18" charset="-127"/>
-              </a:rPr>
-              <a:t/>
-            </a:r>
-            <a:r>
-              <a:rPr lang="ko-KR" altLang="en-US" sz="1000" dirty="0">
-                <a:solidFill>
-                  <a:srgbClr val="0000FF"/>
-                </a:solidFill>
-                <a:latin typeface="HY엽서M" panose="02030600000101010101" pitchFamily="18" charset="-127"/>
-                <a:ea typeface="HY엽서M" panose="02030600000101010101" pitchFamily="18" charset="-127"/>
-              </a:rPr>
-              <a:t/>
-            </a:r>
-            <a:endParaRPr lang="en-US" altLang="ko-KR" sz="1000" dirty="0">
-              <a:solidFill>
-                <a:srgbClr val="0000FF"/>
-              </a:solidFill>
-              <a:latin typeface="HY엽서M" panose="02030600000101010101" pitchFamily="18" charset="-127"/>
-              <a:ea typeface="HY엽서M" panose="02030600000101010101" pitchFamily="18" charset="-127"/>
-            </a:endParaRPr>
-          </a:p>
-          <a:p>
-            <a:r>
-              <a:rPr lang="ko-KR" altLang="en-US" sz="1000" dirty="0">
-                <a:latin typeface="HY엽서M" panose="02030600000101010101" pitchFamily="18" charset="-127"/>
-                <a:ea typeface="HY엽서M" panose="02030600000101010101" pitchFamily="18" charset="-127"/>
-              </a:rPr>
-              <a:t>혈전용해치료비 </a:t>
-            </a:r>
-            <a:r>
-              <a:rPr lang="en-US" altLang="ko-KR" sz="1000" dirty="0">
-                <a:latin typeface="HY엽서M" panose="02030600000101010101" pitchFamily="18" charset="-127"/>
-                <a:ea typeface="HY엽서M" panose="02030600000101010101" pitchFamily="18" charset="-127"/>
-              </a:rPr>
-              <a:t>: </a:t>
-            </a:r>
-            <a:r>
-              <a:rPr lang="ko-KR" altLang="en-US" sz="1000" dirty="0">
-                <a:latin typeface="HY엽서M" panose="02030600000101010101" pitchFamily="18" charset="-127"/>
-                <a:ea typeface="HY엽서M" panose="02030600000101010101" pitchFamily="18" charset="-127"/>
-              </a:rPr>
-              <a:t/>
-            </a:r>
-            <a:endParaRPr lang="en-US" altLang="ko-KR" sz="1000" dirty="0">
-              <a:latin typeface="HY엽서M" panose="02030600000101010101" pitchFamily="18" charset="-127"/>
-              <a:ea typeface="HY엽서M" panose="02030600000101010101" pitchFamily="18" charset="-127"/>
-            </a:endParaRPr>
+                <a:latin typeface="HY엽서M" panose="02030600000101010101" pitchFamily="18" charset="-127"/>
+                <a:ea typeface="HY엽서M" panose="02030600000101010101" pitchFamily="18" charset="-127"/>
+              </a:rPr>
+              <a:t>:</a:t>
+            </a:r>
           </a:p>
           <a:p>
             <a:r>
@@ -4403,9 +4321,7 @@
               </a:ext>
             </a:extLst>
           </p:cNvPr>
-          <p:cNvSpPr txBox="1">
-            <a:spLocks noGrp="1" noRot="1" noMove="1" noResize="1" noEditPoints="1" noAdjustHandles="1" noChangeArrowheads="1" noChangeShapeType="1"/>
-          </p:cNvSpPr>
+          <p:cNvSpPr txBox="1"/>
           <p:nvPr/>
         </p:nvSpPr>
         <p:spPr>
@@ -4447,9 +4363,7 @@
               </a:ext>
             </a:extLst>
           </p:cNvPr>
-          <p:cNvSpPr txBox="1">
-            <a:spLocks noGrp="1" noRot="1" noMove="1" noResize="1" noEditPoints="1" noAdjustHandles="1" noChangeArrowheads="1" noChangeShapeType="1"/>
-          </p:cNvSpPr>
+          <p:cNvSpPr txBox="1"/>
           <p:nvPr/>
         </p:nvSpPr>
         <p:spPr>
@@ -4491,9 +4405,7 @@
               </a:ext>
             </a:extLst>
           </p:cNvPr>
-          <p:cNvSpPr txBox="1">
-            <a:spLocks noGrp="1" noRot="1" noMove="1" noResize="1" noEditPoints="1" noAdjustHandles="1" noChangeArrowheads="1" noChangeShapeType="1"/>
-          </p:cNvSpPr>
+          <p:cNvSpPr txBox="1"/>
           <p:nvPr/>
         </p:nvSpPr>
         <p:spPr>
@@ -4535,9 +4447,7 @@
               </a:ext>
             </a:extLst>
           </p:cNvPr>
-          <p:cNvSpPr txBox="1">
-            <a:spLocks noGrp="1" noRot="1" noMove="1" noResize="1" noEditPoints="1" noAdjustHandles="1" noChangeArrowheads="1" noChangeShapeType="1"/>
-          </p:cNvSpPr>
+          <p:cNvSpPr txBox="1"/>
           <p:nvPr/>
         </p:nvSpPr>
         <p:spPr>
@@ -4585,62 +4495,24 @@
                 <a:latin typeface="HY엽서M" panose="02030600000101010101" pitchFamily="18" charset="-127"/>
                 <a:ea typeface="HY엽서M" panose="02030600000101010101" pitchFamily="18" charset="-127"/>
               </a:rPr>
-              <a:t>) : </a:t>
+              <a:t>) :</a:t>
+            </a:r>
+          </a:p>
+          <a:p>
+            <a:r>
+              <a:rPr lang="ko-KR" altLang="en-US" sz="1000" dirty="0">
+                <a:latin typeface="HY엽서M" panose="02030600000101010101" pitchFamily="18" charset="-127"/>
+                <a:ea typeface="HY엽서M" panose="02030600000101010101" pitchFamily="18" charset="-127"/>
+              </a:rPr>
+              <a:t>혈전용해치료비 </a:t>
             </a:r>
             <a:r>
               <a:rPr lang="en-US" altLang="ko-KR" sz="1000" dirty="0">
-                <a:solidFill>
-                  <a:srgbClr val="0000FF"/>
-                </a:solidFill>
-                <a:latin typeface="HY엽서M" panose="02030600000101010101" pitchFamily="18" charset="-127"/>
-                <a:ea typeface="HY엽서M" panose="02030600000101010101" pitchFamily="18" charset="-127"/>
-              </a:rPr>
-              <a:t/>
-            </a:r>
-            <a:r>
-              <a:rPr lang="ko-KR" altLang="en-US" sz="1000" dirty="0">
-                <a:solidFill>
-                  <a:srgbClr val="0000FF"/>
-                </a:solidFill>
-                <a:latin typeface="HY엽서M" panose="02030600000101010101" pitchFamily="18" charset="-127"/>
-                <a:ea typeface="HY엽서M" panose="02030600000101010101" pitchFamily="18" charset="-127"/>
-              </a:rPr>
-              <a:t/>
-            </a:r>
-            <a:endParaRPr lang="en-US" altLang="ko-KR" sz="1000" dirty="0">
-              <a:solidFill>
-                <a:srgbClr val="0000FF"/>
-              </a:solidFill>
-              <a:latin typeface="HY엽서M" panose="02030600000101010101" pitchFamily="18" charset="-127"/>
-              <a:ea typeface="HY엽서M" panose="02030600000101010101" pitchFamily="18" charset="-127"/>
-            </a:endParaRPr>
-          </a:p>
-          <a:p>
-            <a:r>
-              <a:rPr lang="ko-KR" altLang="en-US" sz="1000" dirty="0">
-                <a:latin typeface="HY엽서M" panose="02030600000101010101" pitchFamily="18" charset="-127"/>
-                <a:ea typeface="HY엽서M" panose="02030600000101010101" pitchFamily="18" charset="-127"/>
-              </a:rPr>
-              <a:t>혈전용해치료비 </a:t>
-            </a:r>
-            <a:r>
-              <a:rPr lang="en-US" altLang="ko-KR" sz="1000" dirty="0">
-                <a:latin typeface="HY엽서M" panose="02030600000101010101" pitchFamily="18" charset="-127"/>
-                <a:ea typeface="HY엽서M" panose="02030600000101010101" pitchFamily="18" charset="-127"/>
-              </a:rPr>
-              <a:t>: </a:t>
-            </a:r>
-            <a:r>
-              <a:rPr lang="ko-KR" altLang="en-US" sz="1000" dirty="0">
-                <a:latin typeface="HY엽서M" panose="02030600000101010101" pitchFamily="18" charset="-127"/>
-                <a:ea typeface="HY엽서M" panose="02030600000101010101" pitchFamily="18" charset="-127"/>
-              </a:rPr>
-              <a:t/>
-            </a:r>
-            <a:endParaRPr lang="en-US" altLang="ko-KR" sz="1000" dirty="0">
-              <a:latin typeface="HY엽서M" panose="02030600000101010101" pitchFamily="18" charset="-127"/>
-              <a:ea typeface="HY엽서M" panose="02030600000101010101" pitchFamily="18" charset="-127"/>
-            </a:endParaRPr>
+                <a:latin typeface="HY엽서M" panose="02030600000101010101" pitchFamily="18" charset="-127"/>
+                <a:ea typeface="HY엽서M" panose="02030600000101010101" pitchFamily="18" charset="-127"/>
+              </a:rPr>
+              <a:t>:</a:t>
+            </a:r>
           </a:p>
           <a:p>
             <a:r>
@@ -4680,15 +4552,13 @@
               </a:ext>
             </a:extLst>
           </p:cNvPr>
-          <p:cNvSpPr txBox="1">
-            <a:spLocks noGrp="1" noRot="1" noMove="1" noResize="1" noEditPoints="1" noAdjustHandles="1" noChangeArrowheads="1" noChangeShapeType="1"/>
-          </p:cNvSpPr>
+          <p:cNvSpPr txBox="1"/>
           <p:nvPr/>
         </p:nvSpPr>
         <p:spPr>
           <a:xfrm>
-            <a:off x="216544" y="4986714"/>
-            <a:ext cx="3448234" cy="276999"/>
+            <a:off x="241345" y="4832054"/>
+            <a:ext cx="3448234" cy="461665"/>
           </a:xfrm>
           <a:prstGeom prst="rect">
             <a:avLst/>
@@ -4705,25 +4575,41 @@
           <a:lstStyle/>
           <a:p>
             <a:r>
+              <a:rPr lang="ko-KR" altLang="en-US" sz="1200" dirty="0" err="1">
+                <a:latin typeface="HY엽서M" panose="02030600000101010101" pitchFamily="18" charset="-127"/>
+                <a:ea typeface="HY엽서M" panose="02030600000101010101" pitchFamily="18" charset="-127"/>
+              </a:rPr>
+              <a:t>상급병원암주요치료비</a:t>
+            </a:r>
+            <a:r>
               <a:rPr lang="ko-KR" altLang="en-US" sz="1200" dirty="0">
                 <a:latin typeface="HY엽서M" panose="02030600000101010101" pitchFamily="18" charset="-127"/>
                 <a:ea typeface="HY엽서M" panose="02030600000101010101" pitchFamily="18" charset="-127"/>
               </a:rPr>
-              <a:t>암주요치료비 </a:t>
+              <a:t> </a:t>
             </a:r>
             <a:r>
               <a:rPr lang="en-US" altLang="ko-KR" sz="1200" dirty="0">
                 <a:latin typeface="HY엽서M" panose="02030600000101010101" pitchFamily="18" charset="-127"/>
                 <a:ea typeface="HY엽서M" panose="02030600000101010101" pitchFamily="18" charset="-127"/>
               </a:rPr>
-              <a:t>:        / </a:t>
+              <a:t>: </a:t>
+            </a:r>
+          </a:p>
+          <a:p>
+            <a:r>
+              <a:rPr lang="ko-KR" altLang="en-US" sz="1200" dirty="0" err="1">
+                <a:latin typeface="HY엽서M" panose="02030600000101010101" pitchFamily="18" charset="-127"/>
+                <a:ea typeface="HY엽서M" panose="02030600000101010101" pitchFamily="18" charset="-127"/>
+              </a:rPr>
+              <a:t>상급병원하이클래스</a:t>
             </a:r>
             <a:r>
               <a:rPr lang="ko-KR" altLang="en-US" sz="1200" dirty="0">
                 <a:latin typeface="HY엽서M" panose="02030600000101010101" pitchFamily="18" charset="-127"/>
                 <a:ea typeface="HY엽서M" panose="02030600000101010101" pitchFamily="18" charset="-127"/>
               </a:rPr>
-              <a:t>하이클래스 </a:t>
+              <a:t> </a:t>
             </a:r>
             <a:r>
               <a:rPr lang="en-US" altLang="ko-KR" sz="1200" dirty="0">
@@ -4748,9 +4634,7 @@
               </a:ext>
             </a:extLst>
           </p:cNvPr>
-          <p:cNvSpPr txBox="1">
-            <a:spLocks noGrp="1" noRot="1" noMove="1" noResize="1" noEditPoints="1" noAdjustHandles="1" noChangeArrowheads="1" noChangeShapeType="1"/>
-          </p:cNvSpPr>
+          <p:cNvSpPr txBox="1"/>
           <p:nvPr/>
         </p:nvSpPr>
         <p:spPr>
@@ -4792,9 +4676,7 @@
               </a:ext>
             </a:extLst>
           </p:cNvPr>
-          <p:cNvSpPr txBox="1">
-            <a:spLocks noGrp="1" noRot="1" noMove="1" noResize="1" noEditPoints="1" noAdjustHandles="1" noChangeArrowheads="1" noChangeShapeType="1"/>
-          </p:cNvSpPr>
+          <p:cNvSpPr txBox="1"/>
           <p:nvPr/>
         </p:nvSpPr>
         <p:spPr>
@@ -4860,7 +4742,7 @@
                 <a:latin typeface="HY엽서M" panose="02030600000101010101" pitchFamily="18" charset="-127"/>
                 <a:ea typeface="HY엽서M" panose="02030600000101010101" pitchFamily="18" charset="-127"/>
               </a:rPr>
-              <a:t>: </a:t>
+              <a:t>: ___________)</a:t>
             </a:r>
             <a:endParaRPr lang="ko-KR" altLang="en-US" sz="1050" dirty="0">
               <a:solidFill>
@@ -4881,9 +4763,7 @@
               </a:ext>
             </a:extLst>
           </p:cNvPr>
-          <p:cNvSpPr txBox="1">
-            <a:spLocks noGrp="1" noRot="1" noMove="1" noResize="1" noEditPoints="1" noAdjustHandles="1" noChangeArrowheads="1" noChangeShapeType="1"/>
-          </p:cNvSpPr>
+          <p:cNvSpPr txBox="1"/>
           <p:nvPr/>
         </p:nvSpPr>
         <p:spPr>
@@ -4945,9 +4825,7 @@
               </a:ext>
             </a:extLst>
           </p:cNvPr>
-          <p:cNvSpPr txBox="1">
-            <a:spLocks noGrp="1" noRot="1" noMove="1" noResize="1" noEditPoints="1" noAdjustHandles="1" noChangeArrowheads="1" noChangeShapeType="1"/>
-          </p:cNvSpPr>
+          <p:cNvSpPr txBox="1"/>
           <p:nvPr/>
         </p:nvSpPr>
         <p:spPr>
@@ -5009,9 +4887,7 @@
               </a:ext>
             </a:extLst>
           </p:cNvPr>
-          <p:cNvSpPr>
-            <a:spLocks noGrp="1" noRot="1" noMove="1" noResize="1" noEditPoints="1" noAdjustHandles="1" noChangeArrowheads="1" noChangeShapeType="1"/>
-          </p:cNvSpPr>
+          <p:cNvSpPr/>
           <p:nvPr/>
         </p:nvSpPr>
         <p:spPr>
@@ -5062,9 +4938,7 @@
               </a:ext>
             </a:extLst>
           </p:cNvPr>
-          <p:cNvSpPr txBox="1">
-            <a:spLocks noGrp="1" noRot="1" noMove="1" noResize="1" noEditPoints="1" noAdjustHandles="1" noChangeArrowheads="1" noChangeShapeType="1"/>
-          </p:cNvSpPr>
+          <p:cNvSpPr txBox="1"/>
           <p:nvPr/>
         </p:nvSpPr>
         <p:spPr>
@@ -5106,9 +4980,7 @@
               </a:ext>
             </a:extLst>
           </p:cNvPr>
-          <p:cNvSpPr>
-            <a:spLocks noGrp="1" noRot="1" noMove="1" noResize="1" noEditPoints="1" noAdjustHandles="1" noChangeArrowheads="1" noChangeShapeType="1"/>
-          </p:cNvSpPr>
+          <p:cNvSpPr/>
           <p:nvPr/>
         </p:nvSpPr>
         <p:spPr>
@@ -5155,9 +5027,7 @@
               </a:ext>
             </a:extLst>
           </p:cNvPr>
-          <p:cNvSpPr>
-            <a:spLocks noGrp="1" noRot="1" noMove="1" noResize="1" noEditPoints="1" noAdjustHandles="1" noChangeArrowheads="1" noChangeShapeType="1"/>
-          </p:cNvSpPr>
+          <p:cNvSpPr/>
           <p:nvPr/>
         </p:nvSpPr>
         <p:spPr>
@@ -5208,9 +5078,7 @@
               </a:ext>
             </a:extLst>
           </p:cNvPr>
-          <p:cNvSpPr>
-            <a:spLocks noGrp="1" noRot="1" noMove="1" noResize="1" noEditPoints="1" noAdjustHandles="1" noChangeArrowheads="1" noChangeShapeType="1"/>
-          </p:cNvSpPr>
+          <p:cNvSpPr/>
           <p:nvPr/>
         </p:nvSpPr>
         <p:spPr>
@@ -5261,9 +5129,7 @@
               </a:ext>
             </a:extLst>
           </p:cNvPr>
-          <p:cNvSpPr>
-            <a:spLocks noGrp="1" noRot="1" noMove="1" noResize="1" noEditPoints="1" noAdjustHandles="1" noChangeArrowheads="1" noChangeShapeType="1"/>
-          </p:cNvSpPr>
+          <p:cNvSpPr/>
           <p:nvPr/>
         </p:nvSpPr>
         <p:spPr>
@@ -5314,9 +5180,7 @@
               </a:ext>
             </a:extLst>
           </p:cNvPr>
-          <p:cNvSpPr txBox="1">
-            <a:spLocks noGrp="1" noRot="1" noMove="1" noResize="1" noEditPoints="1" noAdjustHandles="1" noChangeArrowheads="1" noChangeShapeType="1"/>
-          </p:cNvSpPr>
+          <p:cNvSpPr txBox="1"/>
           <p:nvPr/>
         </p:nvSpPr>
         <p:spPr>
@@ -5378,9 +5242,7 @@
               </a:ext>
             </a:extLst>
           </p:cNvPr>
-          <p:cNvSpPr>
-            <a:spLocks noGrp="1" noRot="1" noMove="1" noResize="1" noEditPoints="1" noAdjustHandles="1" noChangeArrowheads="1" noChangeShapeType="1"/>
-          </p:cNvSpPr>
+          <p:cNvSpPr/>
           <p:nvPr/>
         </p:nvSpPr>
         <p:spPr>
@@ -5431,9 +5293,7 @@
               </a:ext>
             </a:extLst>
           </p:cNvPr>
-          <p:cNvSpPr txBox="1">
-            <a:spLocks noGrp="1" noRot="1" noMove="1" noResize="1" noEditPoints="1" noAdjustHandles="1" noChangeArrowheads="1" noChangeShapeType="1"/>
-          </p:cNvSpPr>
+          <p:cNvSpPr txBox="1"/>
           <p:nvPr/>
         </p:nvSpPr>
         <p:spPr>
@@ -5495,9 +5355,7 @@
               </a:ext>
             </a:extLst>
           </p:cNvPr>
-          <p:cNvSpPr>
-            <a:spLocks noGrp="1" noRot="1" noMove="1" noResize="1" noEditPoints="1" noAdjustHandles="1" noChangeArrowheads="1" noChangeShapeType="1"/>
-          </p:cNvSpPr>
+          <p:cNvSpPr/>
           <p:nvPr/>
         </p:nvSpPr>
         <p:spPr>
@@ -5544,9 +5402,7 @@
               </a:ext>
             </a:extLst>
           </p:cNvPr>
-          <p:cNvSpPr txBox="1">
-            <a:spLocks noGrp="1" noRot="1" noMove="1" noResize="1" noEditPoints="1" noAdjustHandles="1" noChangeArrowheads="1" noChangeShapeType="1"/>
-          </p:cNvSpPr>
+          <p:cNvSpPr txBox="1"/>
           <p:nvPr/>
         </p:nvSpPr>
         <p:spPr>
@@ -5567,35 +5423,22 @@
           <a:p>
             <a:pPr algn="ctr"/>
             <a:r>
-              <a:rPr lang="ko-KR" altLang="en-US" sz="1400" dirty="0">
+              <a:rPr lang="en-US" altLang="ko-KR" sz="1400">
                 <a:solidFill>
                   <a:srgbClr val="FF0000"/>
                 </a:solidFill>
                 <a:latin typeface="HY엽서M" panose="02030600000101010101" pitchFamily="18" charset="-127"/>
                 <a:ea typeface="HY엽서M" panose="02030600000101010101" pitchFamily="18" charset="-127"/>
               </a:rPr>
-              <a:t>연금</a:t>
-            </a:r>
-            <a:r>
-              <a:rPr lang="en-US" altLang="ko-KR" sz="1400" dirty="0">
-                <a:solidFill>
-                  <a:srgbClr val="FF0000"/>
-                </a:solidFill>
-                <a:latin typeface="HY엽서M" panose="02030600000101010101" pitchFamily="18" charset="-127"/>
-                <a:ea typeface="HY엽서M" panose="02030600000101010101" pitchFamily="18" charset="-127"/>
-              </a:rPr>
-              <a:t>/</a:t>
-            </a:r>
-            <a:r>
-              <a:rPr lang="ko-KR" altLang="en-US" sz="1400" dirty="0">
-                <a:solidFill>
-                  <a:srgbClr val="FF0000"/>
-                </a:solidFill>
-                <a:latin typeface="HY엽서M" panose="02030600000101010101" pitchFamily="18" charset="-127"/>
-                <a:ea typeface="HY엽서M" panose="02030600000101010101" pitchFamily="18" charset="-127"/>
-              </a:rPr>
-              <a:t>저축</a:t>
-            </a:r>
+              <a:t>MEMO</a:t>
+            </a:r>
+            <a:endParaRPr lang="ko-KR" altLang="en-US" sz="1400" dirty="0">
+              <a:solidFill>
+                <a:srgbClr val="FF0000"/>
+              </a:solidFill>
+              <a:latin typeface="HY엽서M" panose="02030600000101010101" pitchFamily="18" charset="-127"/>
+              <a:ea typeface="HY엽서M" panose="02030600000101010101" pitchFamily="18" charset="-127"/>
+            </a:endParaRPr>
           </a:p>
         </p:txBody>
       </p:sp>
@@ -5608,9 +5451,7 @@
               </a:ext>
             </a:extLst>
           </p:cNvPr>
-          <p:cNvSpPr>
-            <a:spLocks noGrp="1" noRot="1" noMove="1" noResize="1" noEditPoints="1" noAdjustHandles="1" noChangeArrowheads="1" noChangeShapeType="1"/>
-          </p:cNvSpPr>
+          <p:cNvSpPr/>
           <p:nvPr/>
         </p:nvSpPr>
         <p:spPr>
@@ -5657,9 +5498,7 @@
               </a:ext>
             </a:extLst>
           </p:cNvPr>
-          <p:cNvSpPr txBox="1">
-            <a:spLocks noGrp="1" noRot="1" noMove="1" noResize="1" noEditPoints="1" noAdjustHandles="1" noChangeArrowheads="1" noChangeShapeType="1"/>
-          </p:cNvSpPr>
+          <p:cNvSpPr txBox="1"/>
           <p:nvPr/>
         </p:nvSpPr>
         <p:spPr>
@@ -5701,9 +5540,7 @@
               </a:ext>
             </a:extLst>
           </p:cNvPr>
-          <p:cNvSpPr>
-            <a:spLocks noGrp="1" noRot="1" noMove="1" noResize="1" noEditPoints="1" noAdjustHandles="1" noChangeArrowheads="1" noChangeShapeType="1"/>
-          </p:cNvSpPr>
+          <p:cNvSpPr/>
           <p:nvPr/>
         </p:nvSpPr>
         <p:spPr>
@@ -5754,9 +5591,7 @@
               </a:ext>
             </a:extLst>
           </p:cNvPr>
-          <p:cNvSpPr txBox="1">
-            <a:spLocks noGrp="1" noRot="1" noMove="1" noResize="1" noEditPoints="1" noAdjustHandles="1" noChangeArrowheads="1" noChangeShapeType="1"/>
-          </p:cNvSpPr>
+          <p:cNvSpPr txBox="1"/>
           <p:nvPr/>
         </p:nvSpPr>
         <p:spPr>
@@ -5806,7 +5641,7 @@
             </a:extLst>
           </p:cNvPr>
           <p:cNvCxnSpPr>
-            <a:cxnSpLocks noGrp="1" noRot="1" noMove="1" noResize="1" noEditPoints="1" noAdjustHandles="1" noChangeArrowheads="1" noChangeShapeType="1"/>
+            <a:cxnSpLocks/>
             <a:stCxn id="81" idx="0"/>
             <a:endCxn id="81" idx="2"/>
           </p:cNvCxnSpPr>
@@ -5850,9 +5685,7 @@
               </a:ext>
             </a:extLst>
           </p:cNvPr>
-          <p:cNvSpPr txBox="1">
-            <a:spLocks noGrp="1" noRot="1" noMove="1" noResize="1" noEditPoints="1" noAdjustHandles="1" noChangeArrowheads="1" noChangeShapeType="1"/>
-          </p:cNvSpPr>
+          <p:cNvSpPr txBox="1"/>
           <p:nvPr/>
         </p:nvSpPr>
         <p:spPr>
@@ -5888,33 +5721,6 @@
               </a:rPr>
               <a:t>: </a:t>
             </a:r>
-            <a:r>
-              <a:rPr lang="en-US" altLang="ko-KR" sz="1200" dirty="0">
-                <a:solidFill>
-                  <a:srgbClr val="0000FF"/>
-                </a:solidFill>
-                <a:latin typeface="HY엽서M" panose="02030600000101010101" pitchFamily="18" charset="-127"/>
-                <a:ea typeface="HY엽서M" panose="02030600000101010101" pitchFamily="18" charset="-127"/>
-              </a:rPr>
-              <a:t/>
-            </a:r>
-            <a:r>
-              <a:rPr lang="ko-KR" altLang="en-US" sz="1200" dirty="0">
-                <a:solidFill>
-                  <a:srgbClr val="0000FF"/>
-                </a:solidFill>
-                <a:latin typeface="HY엽서M" panose="02030600000101010101" pitchFamily="18" charset="-127"/>
-                <a:ea typeface="HY엽서M" panose="02030600000101010101" pitchFamily="18" charset="-127"/>
-              </a:rPr>
-              <a:t/>
-            </a:r>
-            <a:r>
-              <a:rPr lang="en-US" altLang="ko-KR" sz="1200" dirty="0">
-                <a:latin typeface="HY엽서M" panose="02030600000101010101" pitchFamily="18" charset="-127"/>
-                <a:ea typeface="HY엽서M" panose="02030600000101010101" pitchFamily="18" charset="-127"/>
-              </a:rPr>
-              <a:t> </a:t>
-            </a:r>
             <a:endParaRPr lang="ko-KR" altLang="en-US" sz="1200" dirty="0">
               <a:latin typeface="HY엽서M" panose="02030600000101010101" pitchFamily="18" charset="-127"/>
               <a:ea typeface="HY엽서M" panose="02030600000101010101" pitchFamily="18" charset="-127"/>
@@ -5931,9 +5737,7 @@
               </a:ext>
             </a:extLst>
           </p:cNvPr>
-          <p:cNvSpPr txBox="1">
-            <a:spLocks noGrp="1" noRot="1" noMove="1" noResize="1" noEditPoints="1" noAdjustHandles="1" noChangeArrowheads="1" noChangeShapeType="1"/>
-          </p:cNvSpPr>
+          <p:cNvSpPr txBox="1"/>
           <p:nvPr/>
         </p:nvSpPr>
         <p:spPr>
@@ -5969,25 +5773,28 @@
               </a:rPr>
               <a:t>: </a:t>
             </a:r>
+          </a:p>
+          <a:p>
             <a:r>
               <a:rPr lang="ko-KR" altLang="en-US" sz="1200" dirty="0">
                 <a:latin typeface="HY엽서M" panose="02030600000101010101" pitchFamily="18" charset="-127"/>
                 <a:ea typeface="HY엽서M" panose="02030600000101010101" pitchFamily="18" charset="-127"/>
               </a:rPr>
-              <a:t/>
-            </a:r>
-            <a:endParaRPr lang="en-US" altLang="ko-KR" sz="1200" dirty="0">
-              <a:latin typeface="HY엽서M" panose="02030600000101010101" pitchFamily="18" charset="-127"/>
-              <a:ea typeface="HY엽서M" panose="02030600000101010101" pitchFamily="18" charset="-127"/>
-            </a:endParaRPr>
-          </a:p>
-          <a:p>
+              <a:t>통원 </a:t>
+            </a:r>
+            <a:r>
+              <a:rPr lang="en-US" altLang="ko-KR" sz="1200" dirty="0">
+                <a:latin typeface="HY엽서M" panose="02030600000101010101" pitchFamily="18" charset="-127"/>
+                <a:ea typeface="HY엽서M" panose="02030600000101010101" pitchFamily="18" charset="-127"/>
+              </a:rPr>
+              <a:t>:      / </a:t>
+            </a:r>
             <a:r>
               <a:rPr lang="ko-KR" altLang="en-US" sz="1200" dirty="0">
                 <a:latin typeface="HY엽서M" panose="02030600000101010101" pitchFamily="18" charset="-127"/>
                 <a:ea typeface="HY엽서M" panose="02030600000101010101" pitchFamily="18" charset="-127"/>
               </a:rPr>
-              <a:t>통원</a:t>
+              <a:t>약 </a:t>
             </a:r>
             <a:r>
               <a:rPr lang="en-US" altLang="ko-KR" sz="1200" dirty="0">
@@ -5995,48 +5802,6 @@
                 <a:ea typeface="HY엽서M" panose="02030600000101010101" pitchFamily="18" charset="-127"/>
               </a:rPr>
               <a:t>: </a:t>
-            </a:r>
-            <a:r>
-              <a:rPr lang="ko-KR" altLang="en-US" sz="1200" dirty="0">
-                <a:latin typeface="HY엽서M" panose="02030600000101010101" pitchFamily="18" charset="-127"/>
-                <a:ea typeface="HY엽서M" panose="02030600000101010101" pitchFamily="18" charset="-127"/>
-              </a:rPr>
-              <a:t> </a:t>
-            </a:r>
-            <a:r>
-              <a:rPr lang="en-US" altLang="ko-KR" sz="1200" dirty="0">
-                <a:latin typeface="HY엽서M" panose="02030600000101010101" pitchFamily="18" charset="-127"/>
-                <a:ea typeface="HY엽서M" panose="02030600000101010101" pitchFamily="18" charset="-127"/>
-              </a:rPr>
-              <a:t>/ </a:t>
-            </a:r>
-            <a:r>
-              <a:rPr lang="ko-KR" altLang="en-US" sz="1200" dirty="0">
-                <a:latin typeface="HY엽서M" panose="02030600000101010101" pitchFamily="18" charset="-127"/>
-                <a:ea typeface="HY엽서M" panose="02030600000101010101" pitchFamily="18" charset="-127"/>
-              </a:rPr>
-              <a:t>약</a:t>
-            </a:r>
-            <a:r>
-              <a:rPr lang="en-US" altLang="ko-KR" sz="1200" dirty="0">
-                <a:latin typeface="HY엽서M" panose="02030600000101010101" pitchFamily="18" charset="-127"/>
-                <a:ea typeface="HY엽서M" panose="02030600000101010101" pitchFamily="18" charset="-127"/>
-              </a:rPr>
-              <a:t>: </a:t>
-            </a:r>
-            <a:r>
-              <a:rPr lang="ko-KR" altLang="en-US" sz="1200" dirty="0">
-                <a:latin typeface="HY엽서M" panose="02030600000101010101" pitchFamily="18" charset="-127"/>
-                <a:ea typeface="HY엽서M" panose="02030600000101010101" pitchFamily="18" charset="-127"/>
-              </a:rPr>
-              <a:t/>
-            </a:r>
-            <a:r>
-              <a:rPr lang="en-US" altLang="ko-KR" sz="1200" dirty="0">
-                <a:latin typeface="HY엽서M" panose="02030600000101010101" pitchFamily="18" charset="-127"/>
-                <a:ea typeface="HY엽서M" panose="02030600000101010101" pitchFamily="18" charset="-127"/>
-              </a:rPr>
-              <a:t> </a:t>
             </a:r>
           </a:p>
           <a:p>
@@ -6095,9 +5860,7 @@
               </a:ext>
             </a:extLst>
           </p:cNvPr>
-          <p:cNvSpPr txBox="1">
-            <a:spLocks noGrp="1" noRot="1" noMove="1" noResize="1" noEditPoints="1" noAdjustHandles="1" noChangeArrowheads="1" noChangeShapeType="1"/>
-          </p:cNvSpPr>
+          <p:cNvSpPr txBox="1"/>
           <p:nvPr/>
         </p:nvSpPr>
         <p:spPr>
@@ -6133,12 +5896,97 @@
               </a:rPr>
               <a:t>: </a:t>
             </a:r>
+          </a:p>
+          <a:p>
+            <a:r>
+              <a:rPr lang="en-US" altLang="ko-KR" sz="1200" dirty="0">
+                <a:latin typeface="HY엽서M" panose="02030600000101010101" pitchFamily="18" charset="-127"/>
+                <a:ea typeface="HY엽서M" panose="02030600000101010101" pitchFamily="18" charset="-127"/>
+              </a:rPr>
+              <a:t>5</a:t>
+            </a:r>
+            <a:r>
+              <a:rPr lang="ko-KR" altLang="en-US" sz="1200" dirty="0" err="1">
+                <a:latin typeface="HY엽서M" panose="02030600000101010101" pitchFamily="18" charset="-127"/>
+                <a:ea typeface="HY엽서M" panose="02030600000101010101" pitchFamily="18" charset="-127"/>
+              </a:rPr>
+              <a:t>대골절</a:t>
+            </a:r>
             <a:r>
               <a:rPr lang="ko-KR" altLang="en-US" sz="1200" dirty="0">
                 <a:latin typeface="HY엽서M" panose="02030600000101010101" pitchFamily="18" charset="-127"/>
                 <a:ea typeface="HY엽서M" panose="02030600000101010101" pitchFamily="18" charset="-127"/>
               </a:rPr>
-              <a:t/>
+              <a:t> </a:t>
+            </a:r>
+            <a:r>
+              <a:rPr lang="en-US" altLang="ko-KR" sz="1200" dirty="0">
+                <a:latin typeface="HY엽서M" panose="02030600000101010101" pitchFamily="18" charset="-127"/>
+                <a:ea typeface="HY엽서M" panose="02030600000101010101" pitchFamily="18" charset="-127"/>
+              </a:rPr>
+              <a:t>: </a:t>
+            </a:r>
+          </a:p>
+          <a:p>
+            <a:r>
+              <a:rPr lang="ko-KR" altLang="en-US" sz="1200" dirty="0">
+                <a:latin typeface="HY엽서M" panose="02030600000101010101" pitchFamily="18" charset="-127"/>
+                <a:ea typeface="HY엽서M" panose="02030600000101010101" pitchFamily="18" charset="-127"/>
+              </a:rPr>
+              <a:t>화상 </a:t>
+            </a:r>
+            <a:r>
+              <a:rPr lang="en-US" altLang="ko-KR" sz="1200" dirty="0">
+                <a:latin typeface="HY엽서M" panose="02030600000101010101" pitchFamily="18" charset="-127"/>
+                <a:ea typeface="HY엽서M" panose="02030600000101010101" pitchFamily="18" charset="-127"/>
+              </a:rPr>
+              <a:t>: </a:t>
+            </a:r>
+          </a:p>
+          <a:p>
+            <a:r>
+              <a:rPr lang="ko-KR" altLang="en-US" sz="1200" dirty="0">
+                <a:latin typeface="HY엽서M" panose="02030600000101010101" pitchFamily="18" charset="-127"/>
+                <a:ea typeface="HY엽서M" panose="02030600000101010101" pitchFamily="18" charset="-127"/>
+              </a:rPr>
+              <a:t>중대화상 </a:t>
+            </a:r>
+            <a:r>
+              <a:rPr lang="en-US" altLang="ko-KR" sz="1200" dirty="0">
+                <a:latin typeface="HY엽서M" panose="02030600000101010101" pitchFamily="18" charset="-127"/>
+                <a:ea typeface="HY엽서M" panose="02030600000101010101" pitchFamily="18" charset="-127"/>
+              </a:rPr>
+              <a:t>: </a:t>
+            </a:r>
+          </a:p>
+          <a:p>
+            <a:r>
+              <a:rPr lang="ko-KR" altLang="en-US" sz="1200" dirty="0" err="1">
+                <a:latin typeface="HY엽서M" panose="02030600000101010101" pitchFamily="18" charset="-127"/>
+                <a:ea typeface="HY엽서M" panose="02030600000101010101" pitchFamily="18" charset="-127"/>
+              </a:rPr>
+              <a:t>반깁스</a:t>
+            </a:r>
+            <a:r>
+              <a:rPr lang="ko-KR" altLang="en-US" sz="1200" dirty="0">
+                <a:latin typeface="HY엽서M" panose="02030600000101010101" pitchFamily="18" charset="-127"/>
+                <a:ea typeface="HY엽서M" panose="02030600000101010101" pitchFamily="18" charset="-127"/>
+              </a:rPr>
+              <a:t>  </a:t>
+            </a:r>
+            <a:r>
+              <a:rPr lang="en-US" altLang="ko-KR" sz="1200" dirty="0">
+                <a:latin typeface="HY엽서M" panose="02030600000101010101" pitchFamily="18" charset="-127"/>
+                <a:ea typeface="HY엽서M" panose="02030600000101010101" pitchFamily="18" charset="-127"/>
+              </a:rPr>
+              <a:t>:</a:t>
+            </a:r>
+            <a:r>
+              <a:rPr lang="ko-KR" altLang="en-US" sz="1200" dirty="0">
+                <a:latin typeface="HY엽서M" panose="02030600000101010101" pitchFamily="18" charset="-127"/>
+                <a:ea typeface="HY엽서M" panose="02030600000101010101" pitchFamily="18" charset="-127"/>
+              </a:rPr>
+              <a:t> </a:t>
             </a:r>
             <a:endParaRPr lang="en-US" altLang="ko-KR" sz="1200" dirty="0">
               <a:latin typeface="HY엽서M" panose="02030600000101010101" pitchFamily="18" charset="-127"/>
@@ -6147,25 +5995,27 @@
           </a:p>
           <a:p>
             <a:r>
+              <a:rPr lang="ko-KR" altLang="en-US" sz="1200" dirty="0">
+                <a:latin typeface="HY엽서M" panose="02030600000101010101" pitchFamily="18" charset="-127"/>
+                <a:ea typeface="HY엽서M" panose="02030600000101010101" pitchFamily="18" charset="-127"/>
+              </a:rPr>
+              <a:t>깁스 </a:t>
+            </a:r>
+            <a:r>
               <a:rPr lang="en-US" altLang="ko-KR" sz="1200" dirty="0">
                 <a:latin typeface="HY엽서M" panose="02030600000101010101" pitchFamily="18" charset="-127"/>
                 <a:ea typeface="HY엽서M" panose="02030600000101010101" pitchFamily="18" charset="-127"/>
               </a:rPr>
-              <a:t>5</a:t>
-            </a:r>
-            <a:r>
-              <a:rPr lang="ko-KR" altLang="en-US" sz="1200" dirty="0" err="1">
-                <a:latin typeface="HY엽서M" panose="02030600000101010101" pitchFamily="18" charset="-127"/>
-                <a:ea typeface="HY엽서M" panose="02030600000101010101" pitchFamily="18" charset="-127"/>
-              </a:rPr>
-              <a:t>대골절</a:t>
-            </a:r>
+              <a:t>: </a:t>
+            </a:r>
+          </a:p>
+          <a:p>
             <a:r>
               <a:rPr lang="ko-KR" altLang="en-US" sz="1200" dirty="0">
                 <a:latin typeface="HY엽서M" panose="02030600000101010101" pitchFamily="18" charset="-127"/>
                 <a:ea typeface="HY엽서M" panose="02030600000101010101" pitchFamily="18" charset="-127"/>
               </a:rPr>
-              <a:t> </a:t>
+              <a:t>응급실 </a:t>
             </a:r>
             <a:r>
               <a:rPr lang="en-US" altLang="ko-KR" sz="1200" dirty="0">
@@ -6174,159 +6024,6 @@
               </a:rPr>
               <a:t>: </a:t>
             </a:r>
-            <a:r>
-              <a:rPr lang="ko-KR" altLang="en-US" sz="1200" dirty="0">
-                <a:latin typeface="HY엽서M" panose="02030600000101010101" pitchFamily="18" charset="-127"/>
-                <a:ea typeface="HY엽서M" panose="02030600000101010101" pitchFamily="18" charset="-127"/>
-              </a:rPr>
-              <a:t/>
-            </a:r>
-            <a:endParaRPr lang="en-US" altLang="ko-KR" sz="1200" dirty="0">
-              <a:latin typeface="HY엽서M" panose="02030600000101010101" pitchFamily="18" charset="-127"/>
-              <a:ea typeface="HY엽서M" panose="02030600000101010101" pitchFamily="18" charset="-127"/>
-            </a:endParaRPr>
-          </a:p>
-          <a:p>
-            <a:r>
-              <a:rPr lang="ko-KR" altLang="en-US" sz="1200" dirty="0">
-                <a:latin typeface="HY엽서M" panose="02030600000101010101" pitchFamily="18" charset="-127"/>
-                <a:ea typeface="HY엽서M" panose="02030600000101010101" pitchFamily="18" charset="-127"/>
-              </a:rPr>
-              <a:t>화상 </a:t>
-            </a:r>
-            <a:r>
-              <a:rPr lang="en-US" altLang="ko-KR" sz="1200" dirty="0">
-                <a:latin typeface="HY엽서M" panose="02030600000101010101" pitchFamily="18" charset="-127"/>
-                <a:ea typeface="HY엽서M" panose="02030600000101010101" pitchFamily="18" charset="-127"/>
-              </a:rPr>
-              <a:t>: </a:t>
-            </a:r>
-            <a:r>
-              <a:rPr lang="ko-KR" altLang="en-US" sz="1200" dirty="0">
-                <a:latin typeface="HY엽서M" panose="02030600000101010101" pitchFamily="18" charset="-127"/>
-                <a:ea typeface="HY엽서M" panose="02030600000101010101" pitchFamily="18" charset="-127"/>
-              </a:rPr>
-              <a:t/>
-            </a:r>
-            <a:endParaRPr lang="en-US" altLang="ko-KR" sz="1200" dirty="0">
-              <a:latin typeface="HY엽서M" panose="02030600000101010101" pitchFamily="18" charset="-127"/>
-              <a:ea typeface="HY엽서M" panose="02030600000101010101" pitchFamily="18" charset="-127"/>
-            </a:endParaRPr>
-          </a:p>
-          <a:p>
-            <a:r>
-              <a:rPr lang="ko-KR" altLang="en-US" sz="1200" dirty="0">
-                <a:latin typeface="HY엽서M" panose="02030600000101010101" pitchFamily="18" charset="-127"/>
-                <a:ea typeface="HY엽서M" panose="02030600000101010101" pitchFamily="18" charset="-127"/>
-              </a:rPr>
-              <a:t>중대화상 </a:t>
-            </a:r>
-            <a:r>
-              <a:rPr lang="en-US" altLang="ko-KR" sz="1200" dirty="0">
-                <a:latin typeface="HY엽서M" panose="02030600000101010101" pitchFamily="18" charset="-127"/>
-                <a:ea typeface="HY엽서M" panose="02030600000101010101" pitchFamily="18" charset="-127"/>
-              </a:rPr>
-              <a:t>: </a:t>
-            </a:r>
-            <a:r>
-              <a:rPr lang="ko-KR" altLang="en-US" sz="1200" dirty="0">
-                <a:latin typeface="HY엽서M" panose="02030600000101010101" pitchFamily="18" charset="-127"/>
-                <a:ea typeface="HY엽서M" panose="02030600000101010101" pitchFamily="18" charset="-127"/>
-              </a:rPr>
-              <a:t/>
-            </a:r>
-            <a:endParaRPr lang="en-US" altLang="ko-KR" sz="1200" dirty="0">
-              <a:latin typeface="HY엽서M" panose="02030600000101010101" pitchFamily="18" charset="-127"/>
-              <a:ea typeface="HY엽서M" panose="02030600000101010101" pitchFamily="18" charset="-127"/>
-            </a:endParaRPr>
-          </a:p>
-          <a:p>
-            <a:r>
-              <a:rPr lang="ko-KR" altLang="en-US" sz="1200" dirty="0" err="1">
-                <a:latin typeface="HY엽서M" panose="02030600000101010101" pitchFamily="18" charset="-127"/>
-                <a:ea typeface="HY엽서M" panose="02030600000101010101" pitchFamily="18" charset="-127"/>
-              </a:rPr>
-              <a:t>반깁스</a:t>
-            </a:r>
-            <a:r>
-              <a:rPr lang="ko-KR" altLang="en-US" sz="1200" dirty="0">
-                <a:latin typeface="HY엽서M" panose="02030600000101010101" pitchFamily="18" charset="-127"/>
-                <a:ea typeface="HY엽서M" panose="02030600000101010101" pitchFamily="18" charset="-127"/>
-              </a:rPr>
-              <a:t>  </a:t>
-            </a:r>
-            <a:r>
-              <a:rPr lang="en-US" altLang="ko-KR" sz="1200" dirty="0">
-                <a:latin typeface="HY엽서M" panose="02030600000101010101" pitchFamily="18" charset="-127"/>
-                <a:ea typeface="HY엽서M" panose="02030600000101010101" pitchFamily="18" charset="-127"/>
-              </a:rPr>
-              <a:t>:</a:t>
-            </a:r>
-            <a:r>
-              <a:rPr lang="ko-KR" altLang="en-US" sz="1200" dirty="0">
-                <a:latin typeface="HY엽서M" panose="02030600000101010101" pitchFamily="18" charset="-127"/>
-                <a:ea typeface="HY엽서M" panose="02030600000101010101" pitchFamily="18" charset="-127"/>
-              </a:rPr>
-              <a:t> </a:t>
-            </a:r>
-            <a:endParaRPr lang="en-US" altLang="ko-KR" sz="1200" dirty="0">
-              <a:latin typeface="HY엽서M" panose="02030600000101010101" pitchFamily="18" charset="-127"/>
-              <a:ea typeface="HY엽서M" panose="02030600000101010101" pitchFamily="18" charset="-127"/>
-            </a:endParaRPr>
-          </a:p>
-          <a:p>
-            <a:r>
-              <a:rPr lang="ko-KR" altLang="en-US" sz="1200" dirty="0">
-                <a:latin typeface="HY엽서M" panose="02030600000101010101" pitchFamily="18" charset="-127"/>
-                <a:ea typeface="HY엽서M" panose="02030600000101010101" pitchFamily="18" charset="-127"/>
-              </a:rPr>
-              <a:t>깁스 </a:t>
-            </a:r>
-            <a:r>
-              <a:rPr lang="en-US" altLang="ko-KR" sz="1200" dirty="0">
-                <a:latin typeface="HY엽서M" panose="02030600000101010101" pitchFamily="18" charset="-127"/>
-                <a:ea typeface="HY엽서M" panose="02030600000101010101" pitchFamily="18" charset="-127"/>
-              </a:rPr>
-              <a:t>: </a:t>
-            </a:r>
-            <a:r>
-              <a:rPr lang="ko-KR" altLang="en-US" sz="1200" dirty="0">
-                <a:latin typeface="HY엽서M" panose="02030600000101010101" pitchFamily="18" charset="-127"/>
-                <a:ea typeface="HY엽서M" panose="02030600000101010101" pitchFamily="18" charset="-127"/>
-              </a:rPr>
-              <a:t/>
-            </a:r>
-            <a:endParaRPr lang="en-US" altLang="ko-KR" sz="1200" dirty="0">
-              <a:latin typeface="HY엽서M" panose="02030600000101010101" pitchFamily="18" charset="-127"/>
-              <a:ea typeface="HY엽서M" panose="02030600000101010101" pitchFamily="18" charset="-127"/>
-            </a:endParaRPr>
-          </a:p>
-          <a:p>
-            <a:r>
-              <a:rPr lang="ko-KR" altLang="en-US" sz="1200" dirty="0">
-                <a:latin typeface="HY엽서M" panose="02030600000101010101" pitchFamily="18" charset="-127"/>
-                <a:ea typeface="HY엽서M" panose="02030600000101010101" pitchFamily="18" charset="-127"/>
-              </a:rPr>
-              <a:t>응급실 </a:t>
-            </a:r>
-            <a:r>
-              <a:rPr lang="en-US" altLang="ko-KR" sz="1200" dirty="0">
-                <a:latin typeface="HY엽서M" panose="02030600000101010101" pitchFamily="18" charset="-127"/>
-                <a:ea typeface="HY엽서M" panose="02030600000101010101" pitchFamily="18" charset="-127"/>
-              </a:rPr>
-              <a:t>: </a:t>
-            </a:r>
-            <a:r>
-              <a:rPr lang="ko-KR" altLang="en-US" sz="1200" dirty="0">
-                <a:latin typeface="HY엽서M" panose="02030600000101010101" pitchFamily="18" charset="-127"/>
-                <a:ea typeface="HY엽서M" panose="02030600000101010101" pitchFamily="18" charset="-127"/>
-              </a:rPr>
-              <a:t/>
-            </a:r>
-            <a:endParaRPr lang="en-US" altLang="ko-KR" sz="1200" dirty="0">
-              <a:latin typeface="HY엽서M" panose="02030600000101010101" pitchFamily="18" charset="-127"/>
-              <a:ea typeface="HY엽서M" panose="02030600000101010101" pitchFamily="18" charset="-127"/>
-            </a:endParaRPr>
           </a:p>
         </p:txBody>
       </p:sp>
@@ -6391,17 +6088,22 @@
               </a:rPr>
               <a:t>80% : </a:t>
             </a:r>
+          </a:p>
+          <a:p>
             <a:r>
               <a:rPr lang="ko-KR" altLang="en-US" sz="1200" dirty="0">
                 <a:latin typeface="HY엽서M" panose="02030600000101010101" pitchFamily="18" charset="-127"/>
                 <a:ea typeface="HY엽서M" panose="02030600000101010101" pitchFamily="18" charset="-127"/>
               </a:rPr>
-              <a:t/>
-            </a:r>
-            <a:endParaRPr lang="en-US" altLang="ko-KR" sz="1200" dirty="0">
-              <a:latin typeface="HY엽서M" panose="02030600000101010101" pitchFamily="18" charset="-127"/>
-              <a:ea typeface="HY엽서M" panose="02030600000101010101" pitchFamily="18" charset="-127"/>
-            </a:endParaRPr>
+              <a:t>상해</a:t>
+            </a:r>
+            <a:r>
+              <a:rPr lang="en-US" altLang="ko-KR" sz="1200" dirty="0">
+                <a:latin typeface="HY엽서M" panose="02030600000101010101" pitchFamily="18" charset="-127"/>
+                <a:ea typeface="HY엽서M" panose="02030600000101010101" pitchFamily="18" charset="-127"/>
+              </a:rPr>
+              <a:t>3% : </a:t>
+            </a:r>
           </a:p>
           <a:p>
             <a:r>
@@ -6409,67 +6111,15 @@
                 <a:latin typeface="HY엽서M" panose="02030600000101010101" pitchFamily="18" charset="-127"/>
                 <a:ea typeface="HY엽서M" panose="02030600000101010101" pitchFamily="18" charset="-127"/>
               </a:rPr>
-              <a:t>상해</a:t>
+              <a:t>상해 </a:t>
             </a:r>
             <a:r>
               <a:rPr lang="en-US" altLang="ko-KR" sz="1200" dirty="0">
                 <a:latin typeface="HY엽서M" panose="02030600000101010101" pitchFamily="18" charset="-127"/>
                 <a:ea typeface="HY엽서M" panose="02030600000101010101" pitchFamily="18" charset="-127"/>
               </a:rPr>
-              <a:t>3% : </a:t>
-            </a:r>
-            <a:r>
-              <a:rPr lang="ko-KR" altLang="en-US" sz="1200" dirty="0">
-                <a:latin typeface="HY엽서M" panose="02030600000101010101" pitchFamily="18" charset="-127"/>
-                <a:ea typeface="HY엽서M" panose="02030600000101010101" pitchFamily="18" charset="-127"/>
-              </a:rPr>
-              <a:t/>
-            </a:r>
-            <a:r>
-              <a:rPr lang="en-US" altLang="ko-KR" sz="1200" dirty="0">
-                <a:latin typeface="HY엽서M" panose="02030600000101010101" pitchFamily="18" charset="-127"/>
-                <a:ea typeface="HY엽서M" panose="02030600000101010101" pitchFamily="18" charset="-127"/>
-              </a:rPr>
-              <a:t/>
-            </a:r>
-            <a:r>
-              <a:rPr lang="ko-KR" altLang="en-US" sz="1200" dirty="0">
-                <a:latin typeface="HY엽서M" panose="02030600000101010101" pitchFamily="18" charset="-127"/>
-                <a:ea typeface="HY엽서M" panose="02030600000101010101" pitchFamily="18" charset="-127"/>
-              </a:rPr>
-              <a:t/>
-            </a:r>
-            <a:endParaRPr lang="en-US" altLang="ko-KR" sz="1200" dirty="0">
-              <a:latin typeface="HY엽서M" panose="02030600000101010101" pitchFamily="18" charset="-127"/>
-              <a:ea typeface="HY엽서M" panose="02030600000101010101" pitchFamily="18" charset="-127"/>
-            </a:endParaRPr>
-          </a:p>
-          <a:p>
-            <a:r>
-              <a:rPr lang="ko-KR" altLang="en-US" sz="1200" dirty="0">
-                <a:latin typeface="HY엽서M" panose="02030600000101010101" pitchFamily="18" charset="-127"/>
-                <a:ea typeface="HY엽서M" panose="02030600000101010101" pitchFamily="18" charset="-127"/>
-              </a:rPr>
-              <a:t>상해 </a:t>
-            </a:r>
-            <a:r>
-              <a:rPr lang="en-US" altLang="ko-KR" sz="1200" dirty="0">
-                <a:latin typeface="HY엽서M" panose="02030600000101010101" pitchFamily="18" charset="-127"/>
-                <a:ea typeface="HY엽서M" panose="02030600000101010101" pitchFamily="18" charset="-127"/>
-              </a:rPr>
-              <a:t>80% : </a:t>
-            </a:r>
-            <a:r>
-              <a:rPr lang="ko-KR" altLang="en-US" sz="1200" dirty="0">
-                <a:latin typeface="HY엽서M" panose="02030600000101010101" pitchFamily="18" charset="-127"/>
-                <a:ea typeface="HY엽서M" panose="02030600000101010101" pitchFamily="18" charset="-127"/>
-              </a:rPr>
-              <a:t/>
-            </a:r>
-            <a:endParaRPr lang="en-US" altLang="ko-KR" sz="1200" dirty="0">
-              <a:latin typeface="HY엽서M" panose="02030600000101010101" pitchFamily="18" charset="-127"/>
-              <a:ea typeface="HY엽서M" panose="02030600000101010101" pitchFamily="18" charset="-127"/>
-            </a:endParaRPr>
+              <a:t>80% :</a:t>
+            </a:r>
           </a:p>
           <a:p>
             <a:r>
@@ -6521,7 +6171,7 @@
         <p:spPr>
           <a:xfrm>
             <a:off x="5166687" y="3424651"/>
-            <a:ext cx="2520000" cy="1384995"/>
+            <a:ext cx="2520000" cy="1200329"/>
           </a:xfrm>
           <a:prstGeom prst="rect">
             <a:avLst/>
@@ -6643,53 +6293,7 @@
                 <a:latin typeface="HY엽서M" panose="02030600000101010101" pitchFamily="18" charset="-127"/>
                 <a:ea typeface="HY엽서M" panose="02030600000101010101" pitchFamily="18" charset="-127"/>
               </a:rPr>
-              <a:t>:</a:t>
-            </a:r>
-          </a:p>
-          <a:p>
-            <a:r>
-              <a:rPr lang="ko-KR" altLang="en-US" sz="1200" dirty="0">
-                <a:latin typeface="HY엽서M" panose="02030600000101010101" pitchFamily="18" charset="-127"/>
-                <a:ea typeface="HY엽서M" panose="02030600000101010101" pitchFamily="18" charset="-127"/>
-              </a:rPr>
-              <a:t>독감 </a:t>
-            </a:r>
-            <a:r>
-              <a:rPr lang="en-US" altLang="ko-KR" sz="1200" dirty="0">
-                <a:latin typeface="HY엽서M" panose="02030600000101010101" pitchFamily="18" charset="-127"/>
-                <a:ea typeface="HY엽서M" panose="02030600000101010101" pitchFamily="18" charset="-127"/>
-              </a:rPr>
               <a:t>: </a:t>
-            </a:r>
-            <a:r>
-              <a:rPr lang="en-US" altLang="ko-KR" sz="1200" dirty="0">
-                <a:solidFill>
-                  <a:srgbClr val="0000FF"/>
-                </a:solidFill>
-                <a:latin typeface="HY엽서M" panose="02030600000101010101" pitchFamily="18" charset="-127"/>
-                <a:ea typeface="HY엽서M" panose="02030600000101010101" pitchFamily="18" charset="-127"/>
-              </a:rPr>
-              <a:t/>
-            </a:r>
-            <a:r>
-              <a:rPr lang="ko-KR" altLang="en-US" sz="1200" dirty="0">
-                <a:solidFill>
-                  <a:srgbClr val="0000FF"/>
-                </a:solidFill>
-                <a:latin typeface="HY엽서M" panose="02030600000101010101" pitchFamily="18" charset="-127"/>
-                <a:ea typeface="HY엽서M" panose="02030600000101010101" pitchFamily="18" charset="-127"/>
-              </a:rPr>
-              <a:t/>
-            </a:r>
-            <a:r>
-              <a:rPr lang="en-US" altLang="ko-KR" sz="1200" dirty="0">
-                <a:solidFill>
-                  <a:srgbClr val="0000FF"/>
-                </a:solidFill>
-                <a:latin typeface="HY엽서M" panose="02030600000101010101" pitchFamily="18" charset="-127"/>
-                <a:ea typeface="HY엽서M" panose="02030600000101010101" pitchFamily="18" charset="-127"/>
-              </a:rPr>
-              <a:t> </a:t>
             </a:r>
           </a:p>
         </p:txBody>
@@ -6703,9 +6307,7 @@
               </a:ext>
             </a:extLst>
           </p:cNvPr>
-          <p:cNvSpPr txBox="1">
-            <a:spLocks noGrp="1" noRot="1" noMove="1" noResize="1" noEditPoints="1" noAdjustHandles="1" noChangeArrowheads="1" noChangeShapeType="1"/>
-          </p:cNvSpPr>
+          <p:cNvSpPr txBox="1"/>
           <p:nvPr/>
         </p:nvSpPr>
         <p:spPr>
@@ -6808,17 +6410,6 @@
               </a:rPr>
               <a:t>: </a:t>
             </a:r>
-            <a:r>
-              <a:rPr lang="ko-KR" altLang="en-US" sz="1200" dirty="0">
-                <a:latin typeface="HY엽서M" panose="02030600000101010101" pitchFamily="18" charset="-127"/>
-                <a:ea typeface="HY엽서M" panose="02030600000101010101" pitchFamily="18" charset="-127"/>
-              </a:rPr>
-              <a:t/>
-            </a:r>
-            <a:endParaRPr lang="en-US" altLang="ko-KR" sz="1200" dirty="0">
-              <a:latin typeface="HY엽서M" panose="02030600000101010101" pitchFamily="18" charset="-127"/>
-              <a:ea typeface="HY엽서M" panose="02030600000101010101" pitchFamily="18" charset="-127"/>
-            </a:endParaRPr>
           </a:p>
         </p:txBody>
       </p:sp>
@@ -6831,9 +6422,7 @@
               </a:ext>
             </a:extLst>
           </p:cNvPr>
-          <p:cNvSpPr txBox="1">
-            <a:spLocks noGrp="1" noRot="1" noMove="1" noResize="1" noEditPoints="1" noAdjustHandles="1" noChangeArrowheads="1" noChangeShapeType="1"/>
-          </p:cNvSpPr>
+          <p:cNvSpPr txBox="1"/>
           <p:nvPr/>
         </p:nvSpPr>
         <p:spPr>
@@ -6869,45 +6458,6 @@
               </a:rPr>
               <a:t>: </a:t>
             </a:r>
-            <a:r>
-              <a:rPr lang="en-US" altLang="ko-KR" sz="900" dirty="0">
-                <a:latin typeface="HY엽서M" panose="02030600000101010101" pitchFamily="18" charset="-127"/>
-                <a:ea typeface="HY엽서M" panose="02030600000101010101" pitchFamily="18" charset="-127"/>
-              </a:rPr>
-              <a:t/>
-            </a:r>
-            <a:r>
-              <a:rPr lang="ko-KR" altLang="en-US" sz="900" dirty="0">
-                <a:latin typeface="HY엽서M" panose="02030600000101010101" pitchFamily="18" charset="-127"/>
-                <a:ea typeface="HY엽서M" panose="02030600000101010101" pitchFamily="18" charset="-127"/>
-              </a:rPr>
-              <a:t/>
-            </a:r>
-            <a:r>
-              <a:rPr lang="en-US" altLang="ko-KR" sz="900" dirty="0">
-                <a:latin typeface="HY엽서M" panose="02030600000101010101" pitchFamily="18" charset="-127"/>
-                <a:ea typeface="HY엽서M" panose="02030600000101010101" pitchFamily="18" charset="-127"/>
-              </a:rPr>
-              <a:t/>
-            </a:r>
-            <a:r>
-              <a:rPr lang="ko-KR" altLang="en-US" sz="900" dirty="0">
-                <a:latin typeface="HY엽서M" panose="02030600000101010101" pitchFamily="18" charset="-127"/>
-                <a:ea typeface="HY엽서M" panose="02030600000101010101" pitchFamily="18" charset="-127"/>
-              </a:rPr>
-              <a:t/>
-            </a:r>
-            <a:r>
-              <a:rPr lang="en-US" altLang="ko-KR" sz="900" dirty="0">
-                <a:latin typeface="HY엽서M" panose="02030600000101010101" pitchFamily="18" charset="-127"/>
-                <a:ea typeface="HY엽서M" panose="02030600000101010101" pitchFamily="18" charset="-127"/>
-              </a:rPr>
-              <a:t> </a:t>
-            </a:r>
-            <a:endParaRPr lang="en-US" altLang="ko-KR" sz="1200" dirty="0">
-              <a:latin typeface="HY엽서M" panose="02030600000101010101" pitchFamily="18" charset="-127"/>
-              <a:ea typeface="HY엽서M" panose="02030600000101010101" pitchFamily="18" charset="-127"/>
-            </a:endParaRPr>
           </a:p>
         </p:txBody>
       </p:sp>
@@ -7127,15 +6677,13 @@
               </a:ext>
             </a:extLst>
           </p:cNvPr>
-          <p:cNvSpPr txBox="1">
-            <a:spLocks noGrp="1" noRot="1" noMove="1" noResize="1" noEditPoints="1" noAdjustHandles="1" noChangeArrowheads="1" noChangeShapeType="1"/>
-          </p:cNvSpPr>
+          <p:cNvSpPr txBox="1"/>
           <p:nvPr/>
         </p:nvSpPr>
         <p:spPr>
           <a:xfrm>
             <a:off x="162211" y="3342373"/>
-            <a:ext cx="3155500" cy="1754326"/>
+            <a:ext cx="3155500" cy="1569660"/>
           </a:xfrm>
           <a:prstGeom prst="rect">
             <a:avLst/>
@@ -7165,47 +6713,149 @@
               </a:rPr>
               <a:t>: </a:t>
             </a:r>
+          </a:p>
+          <a:p>
+            <a:r>
+              <a:rPr lang="ko-KR" altLang="en-US" sz="1200" dirty="0" err="1">
+                <a:latin typeface="HY엽서M" panose="02030600000101010101" pitchFamily="18" charset="-127"/>
+                <a:ea typeface="HY엽서M" panose="02030600000101010101" pitchFamily="18" charset="-127"/>
+              </a:rPr>
+              <a:t>유사암</a:t>
+            </a:r>
             <a:r>
               <a:rPr lang="ko-KR" altLang="en-US" sz="1200" dirty="0">
                 <a:latin typeface="HY엽서M" panose="02030600000101010101" pitchFamily="18" charset="-127"/>
                 <a:ea typeface="HY엽서M" panose="02030600000101010101" pitchFamily="18" charset="-127"/>
               </a:rPr>
-              <a:t/>
+              <a:t> </a:t>
             </a:r>
             <a:r>
               <a:rPr lang="en-US" altLang="ko-KR" sz="1200" dirty="0">
                 <a:latin typeface="HY엽서M" panose="02030600000101010101" pitchFamily="18" charset="-127"/>
                 <a:ea typeface="HY엽서M" panose="02030600000101010101" pitchFamily="18" charset="-127"/>
               </a:rPr>
-              <a:t/>
+              <a:t>: </a:t>
+            </a:r>
+          </a:p>
+          <a:p>
+            <a:r>
+              <a:rPr lang="ko-KR" altLang="en-US" sz="1200" dirty="0">
+                <a:latin typeface="HY엽서M" panose="02030600000101010101" pitchFamily="18" charset="-127"/>
+                <a:ea typeface="HY엽서M" panose="02030600000101010101" pitchFamily="18" charset="-127"/>
+              </a:rPr>
+              <a:t>통합전이암 </a:t>
             </a:r>
             <a:r>
               <a:rPr lang="en-US" altLang="ko-KR" sz="1200" dirty="0">
-                <a:solidFill>
-                  <a:srgbClr val="0000FF"/>
-                </a:solidFill>
-                <a:latin typeface="HY엽서M" panose="02030600000101010101" pitchFamily="18" charset="-127"/>
-                <a:ea typeface="HY엽서M" panose="02030600000101010101" pitchFamily="18" charset="-127"/>
-              </a:rPr>
-              <a:t/>
+                <a:latin typeface="HY엽서M" panose="02030600000101010101" pitchFamily="18" charset="-127"/>
+                <a:ea typeface="HY엽서M" panose="02030600000101010101" pitchFamily="18" charset="-127"/>
+              </a:rPr>
+              <a:t>: </a:t>
+            </a:r>
+          </a:p>
+          <a:p>
+            <a:r>
+              <a:rPr lang="ko-KR" altLang="en-US" sz="1200" dirty="0" err="1">
+                <a:latin typeface="HY엽서M" panose="02030600000101010101" pitchFamily="18" charset="-127"/>
+                <a:ea typeface="HY엽서M" panose="02030600000101010101" pitchFamily="18" charset="-127"/>
+              </a:rPr>
+              <a:t>중입자</a:t>
             </a:r>
             <a:r>
               <a:rPr lang="ko-KR" altLang="en-US" sz="1200" dirty="0">
-                <a:solidFill>
-                  <a:srgbClr val="0000FF"/>
-                </a:solidFill>
-                <a:latin typeface="HY엽서M" panose="02030600000101010101" pitchFamily="18" charset="-127"/>
-                <a:ea typeface="HY엽서M" panose="02030600000101010101" pitchFamily="18" charset="-127"/>
-              </a:rPr>
-              <a:t/>
-            </a:r>
-            <a:endParaRPr lang="en-US" altLang="ko-KR" sz="1200" dirty="0">
-              <a:solidFill>
-                <a:srgbClr val="0000FF"/>
-              </a:solidFill>
-              <a:latin typeface="HY엽서M" panose="02030600000101010101" pitchFamily="18" charset="-127"/>
-              <a:ea typeface="HY엽서M" panose="02030600000101010101" pitchFamily="18" charset="-127"/>
-            </a:endParaRPr>
+                <a:latin typeface="HY엽서M" panose="02030600000101010101" pitchFamily="18" charset="-127"/>
+                <a:ea typeface="HY엽서M" panose="02030600000101010101" pitchFamily="18" charset="-127"/>
+              </a:rPr>
+              <a:t> </a:t>
+            </a:r>
+            <a:r>
+              <a:rPr lang="en-US" altLang="ko-KR" sz="1200">
+                <a:latin typeface="HY엽서M" panose="02030600000101010101" pitchFamily="18" charset="-127"/>
+                <a:ea typeface="HY엽서M" panose="02030600000101010101" pitchFamily="18" charset="-127"/>
+              </a:rPr>
+              <a:t>: </a:t>
+            </a:r>
+          </a:p>
+          <a:p>
+            <a:r>
+              <a:rPr lang="ko-KR" altLang="en-US" sz="1200" dirty="0">
+                <a:latin typeface="HY엽서M" panose="02030600000101010101" pitchFamily="18" charset="-127"/>
+                <a:ea typeface="HY엽서M" panose="02030600000101010101" pitchFamily="18" charset="-127"/>
+              </a:rPr>
+              <a:t>항암치료 </a:t>
+            </a:r>
+            <a:r>
+              <a:rPr lang="en-US" altLang="ko-KR" sz="1200" dirty="0">
+                <a:latin typeface="HY엽서M" panose="02030600000101010101" pitchFamily="18" charset="-127"/>
+                <a:ea typeface="HY엽서M" panose="02030600000101010101" pitchFamily="18" charset="-127"/>
+              </a:rPr>
+              <a:t>:               / </a:t>
+            </a:r>
+            <a:r>
+              <a:rPr lang="ko-KR" altLang="en-US" sz="1050" dirty="0" err="1">
+                <a:latin typeface="HY엽서M" panose="02030600000101010101" pitchFamily="18" charset="-127"/>
+                <a:ea typeface="HY엽서M" panose="02030600000101010101" pitchFamily="18" charset="-127"/>
+              </a:rPr>
+              <a:t>전이암항암치료</a:t>
+            </a:r>
+            <a:r>
+              <a:rPr lang="ko-KR" altLang="en-US" sz="1050" dirty="0">
+                <a:latin typeface="HY엽서M" panose="02030600000101010101" pitchFamily="18" charset="-127"/>
+                <a:ea typeface="HY엽서M" panose="02030600000101010101" pitchFamily="18" charset="-127"/>
+              </a:rPr>
+              <a:t> </a:t>
+            </a:r>
+            <a:r>
+              <a:rPr lang="en-US" altLang="ko-KR" sz="1200" dirty="0">
+                <a:latin typeface="HY엽서M" panose="02030600000101010101" pitchFamily="18" charset="-127"/>
+                <a:ea typeface="HY엽서M" panose="02030600000101010101" pitchFamily="18" charset="-127"/>
+              </a:rPr>
+              <a:t>:</a:t>
+            </a:r>
+          </a:p>
+          <a:p>
+            <a:r>
+              <a:rPr lang="ko-KR" altLang="en-US" sz="1200" dirty="0">
+                <a:latin typeface="HY엽서M" panose="02030600000101010101" pitchFamily="18" charset="-127"/>
+                <a:ea typeface="HY엽서M" panose="02030600000101010101" pitchFamily="18" charset="-127"/>
+              </a:rPr>
+              <a:t>표적치료</a:t>
+            </a:r>
+            <a:r>
+              <a:rPr lang="en-US" altLang="ko-KR" sz="1200" dirty="0">
+                <a:latin typeface="HY엽서M" panose="02030600000101010101" pitchFamily="18" charset="-127"/>
+                <a:ea typeface="HY엽서M" panose="02030600000101010101" pitchFamily="18" charset="-127"/>
+              </a:rPr>
+              <a:t>:                / </a:t>
+            </a:r>
+            <a:r>
+              <a:rPr lang="ko-KR" altLang="en-US" sz="1200" dirty="0">
+                <a:latin typeface="HY엽서M" panose="02030600000101010101" pitchFamily="18" charset="-127"/>
+                <a:ea typeface="HY엽서M" panose="02030600000101010101" pitchFamily="18" charset="-127"/>
+              </a:rPr>
+              <a:t>양성자</a:t>
+            </a:r>
+            <a:r>
+              <a:rPr lang="en-US" altLang="ko-KR" sz="1200" dirty="0">
+                <a:latin typeface="HY엽서M" panose="02030600000101010101" pitchFamily="18" charset="-127"/>
+                <a:ea typeface="HY엽서M" panose="02030600000101010101" pitchFamily="18" charset="-127"/>
+              </a:rPr>
+              <a:t>.</a:t>
+            </a:r>
+            <a:r>
+              <a:rPr lang="ko-KR" altLang="en-US" sz="1200" dirty="0">
+                <a:latin typeface="HY엽서M" panose="02030600000101010101" pitchFamily="18" charset="-127"/>
+                <a:ea typeface="HY엽서M" panose="02030600000101010101" pitchFamily="18" charset="-127"/>
+              </a:rPr>
+              <a:t>세기 </a:t>
+            </a:r>
+            <a:r>
+              <a:rPr lang="en-US" altLang="ko-KR" sz="1200" dirty="0">
+                <a:latin typeface="HY엽서M" panose="02030600000101010101" pitchFamily="18" charset="-127"/>
+                <a:ea typeface="HY엽서M" panose="02030600000101010101" pitchFamily="18" charset="-127"/>
+              </a:rPr>
+              <a:t>:</a:t>
+            </a:r>
           </a:p>
           <a:p>
             <a:r>
@@ -7213,7 +6863,7 @@
                 <a:latin typeface="HY엽서M" panose="02030600000101010101" pitchFamily="18" charset="-127"/>
                 <a:ea typeface="HY엽서M" panose="02030600000101010101" pitchFamily="18" charset="-127"/>
               </a:rPr>
-              <a:t>유사암</a:t>
+              <a:t>암통원비</a:t>
             </a:r>
             <a:r>
               <a:rPr lang="ko-KR" altLang="en-US" sz="1200" dirty="0">
@@ -7229,346 +6879,22 @@
               </a:rPr>
               <a:t>: </a:t>
             </a:r>
+          </a:p>
+          <a:p>
             <a:r>
               <a:rPr lang="ko-KR" altLang="en-US" sz="1200" dirty="0">
                 <a:latin typeface="HY엽서M" panose="02030600000101010101" pitchFamily="18" charset="-127"/>
                 <a:ea typeface="HY엽서M" panose="02030600000101010101" pitchFamily="18" charset="-127"/>
               </a:rPr>
-              <a:t/>
-            </a:r>
-            <a:endParaRPr lang="en-US" altLang="ko-KR" sz="1200" dirty="0">
-              <a:latin typeface="HY엽서M" panose="02030600000101010101" pitchFamily="18" charset="-127"/>
-              <a:ea typeface="HY엽서M" panose="02030600000101010101" pitchFamily="18" charset="-127"/>
-            </a:endParaRPr>
-          </a:p>
-          <a:p>
-            <a:r>
-              <a:rPr lang="ko-KR" altLang="en-US" sz="1200" dirty="0" err="1">
-                <a:latin typeface="HY엽서M" panose="02030600000101010101" pitchFamily="18" charset="-127"/>
-                <a:ea typeface="HY엽서M" panose="02030600000101010101" pitchFamily="18" charset="-127"/>
-              </a:rPr>
-              <a:t>통합암</a:t>
-            </a:r>
-            <a:r>
-              <a:rPr lang="ko-KR" altLang="en-US" sz="1200" dirty="0">
-                <a:latin typeface="HY엽서M" panose="02030600000101010101" pitchFamily="18" charset="-127"/>
-                <a:ea typeface="HY엽서M" panose="02030600000101010101" pitchFamily="18" charset="-127"/>
-              </a:rPr>
-              <a:t> </a:t>
+              <a:t>다빈치로봇수술비 </a:t>
             </a:r>
             <a:r>
               <a:rPr lang="en-US" altLang="ko-KR" sz="1200" dirty="0">
                 <a:latin typeface="HY엽서M" panose="02030600000101010101" pitchFamily="18" charset="-127"/>
                 <a:ea typeface="HY엽서M" panose="02030600000101010101" pitchFamily="18" charset="-127"/>
               </a:rPr>
-              <a:t>: </a:t>
-            </a:r>
-          </a:p>
-          <a:p>
-            <a:r>
-              <a:rPr lang="ko-KR" altLang="en-US" sz="1200" dirty="0" err="1">
-                <a:latin typeface="HY엽서M" panose="02030600000101010101" pitchFamily="18" charset="-127"/>
-                <a:ea typeface="HY엽서M" panose="02030600000101010101" pitchFamily="18" charset="-127"/>
-              </a:rPr>
-              <a:t>전이암</a:t>
-            </a:r>
-            <a:r>
-              <a:rPr lang="ko-KR" altLang="en-US" sz="1200" dirty="0">
-                <a:latin typeface="HY엽서M" panose="02030600000101010101" pitchFamily="18" charset="-127"/>
-                <a:ea typeface="HY엽서M" panose="02030600000101010101" pitchFamily="18" charset="-127"/>
-              </a:rPr>
-              <a:t> </a:t>
-            </a:r>
-            <a:r>
-              <a:rPr lang="en-US" altLang="ko-KR" sz="1200" dirty="0">
-                <a:latin typeface="HY엽서M" panose="02030600000101010101" pitchFamily="18" charset="-127"/>
-                <a:ea typeface="HY엽서M" panose="02030600000101010101" pitchFamily="18" charset="-127"/>
-              </a:rPr>
-              <a:t>: </a:t>
-            </a:r>
-          </a:p>
-          <a:p>
-            <a:r>
-              <a:rPr lang="ko-KR" altLang="en-US" sz="1200" dirty="0" err="1">
-                <a:latin typeface="HY엽서M" panose="02030600000101010101" pitchFamily="18" charset="-127"/>
-                <a:ea typeface="HY엽서M" panose="02030600000101010101" pitchFamily="18" charset="-127"/>
-              </a:rPr>
-              <a:t>고액암</a:t>
-            </a:r>
-            <a:r>
-              <a:rPr lang="ko-KR" altLang="en-US" sz="1200" dirty="0">
-                <a:latin typeface="HY엽서M" panose="02030600000101010101" pitchFamily="18" charset="-127"/>
-                <a:ea typeface="HY엽서M" panose="02030600000101010101" pitchFamily="18" charset="-127"/>
-              </a:rPr>
-              <a:t> </a:t>
-            </a:r>
-            <a:r>
-              <a:rPr lang="en-US" altLang="ko-KR" sz="1200" dirty="0">
-                <a:latin typeface="HY엽서M" panose="02030600000101010101" pitchFamily="18" charset="-127"/>
-                <a:ea typeface="HY엽서M" panose="02030600000101010101" pitchFamily="18" charset="-127"/>
-              </a:rPr>
               <a:t>:</a:t>
             </a:r>
-          </a:p>
-          <a:p>
-            <a:r>
-              <a:rPr lang="ko-KR" altLang="en-US" sz="1200" dirty="0">
-                <a:latin typeface="HY엽서M" panose="02030600000101010101" pitchFamily="18" charset="-127"/>
-                <a:ea typeface="HY엽서M" panose="02030600000101010101" pitchFamily="18" charset="-127"/>
-              </a:rPr>
-              <a:t>항암치료 </a:t>
-            </a:r>
-            <a:r>
-              <a:rPr lang="en-US" altLang="ko-KR" sz="1200" dirty="0">
-                <a:latin typeface="HY엽서M" panose="02030600000101010101" pitchFamily="18" charset="-127"/>
-                <a:ea typeface="HY엽서M" panose="02030600000101010101" pitchFamily="18" charset="-127"/>
-              </a:rPr>
-              <a:t>: </a:t>
-            </a:r>
-            <a:r>
-              <a:rPr lang="ko-KR" altLang="en-US" sz="1200" dirty="0">
-                <a:latin typeface="HY엽서M" panose="02030600000101010101" pitchFamily="18" charset="-127"/>
-                <a:ea typeface="HY엽서M" panose="02030600000101010101" pitchFamily="18" charset="-127"/>
-              </a:rPr>
-              <a:t/>
-            </a:r>
-            <a:endParaRPr lang="en-US" altLang="ko-KR" sz="1200" dirty="0">
-              <a:latin typeface="HY엽서M" panose="02030600000101010101" pitchFamily="18" charset="-127"/>
-              <a:ea typeface="HY엽서M" panose="02030600000101010101" pitchFamily="18" charset="-127"/>
-            </a:endParaRPr>
-          </a:p>
-          <a:p>
-            <a:r>
-              <a:rPr lang="ko-KR" altLang="en-US" sz="1200" dirty="0">
-                <a:latin typeface="HY엽서M" panose="02030600000101010101" pitchFamily="18" charset="-127"/>
-                <a:ea typeface="HY엽서M" panose="02030600000101010101" pitchFamily="18" charset="-127"/>
-              </a:rPr>
-              <a:t>표적치료</a:t>
-            </a:r>
-            <a:r>
-              <a:rPr lang="en-US" altLang="ko-KR" sz="1200" dirty="0">
-                <a:latin typeface="HY엽서M" panose="02030600000101010101" pitchFamily="18" charset="-127"/>
-                <a:ea typeface="HY엽서M" panose="02030600000101010101" pitchFamily="18" charset="-127"/>
-              </a:rPr>
-              <a:t>: </a:t>
-            </a:r>
-            <a:r>
-              <a:rPr lang="en-US" altLang="ko-KR" sz="1200" dirty="0">
-                <a:solidFill>
-                  <a:srgbClr val="0000FF"/>
-                </a:solidFill>
-                <a:latin typeface="HY엽서M" panose="02030600000101010101" pitchFamily="18" charset="-127"/>
-                <a:ea typeface="HY엽서M" panose="02030600000101010101" pitchFamily="18" charset="-127"/>
-              </a:rPr>
-              <a:t/>
-            </a:r>
-            <a:r>
-              <a:rPr lang="ko-KR" altLang="en-US" sz="1200" dirty="0">
-                <a:solidFill>
-                  <a:srgbClr val="0000FF"/>
-                </a:solidFill>
-                <a:latin typeface="HY엽서M" panose="02030600000101010101" pitchFamily="18" charset="-127"/>
-                <a:ea typeface="HY엽서M" panose="02030600000101010101" pitchFamily="18" charset="-127"/>
-              </a:rPr>
-              <a:t/>
-            </a:r>
-            <a:r>
-              <a:rPr lang="en-US" altLang="ko-KR" sz="1200" dirty="0">
-                <a:solidFill>
-                  <a:srgbClr val="0000FF"/>
-                </a:solidFill>
-                <a:latin typeface="HY엽서M" panose="02030600000101010101" pitchFamily="18" charset="-127"/>
-                <a:ea typeface="HY엽서M" panose="02030600000101010101" pitchFamily="18" charset="-127"/>
-              </a:rPr>
-              <a:t> </a:t>
-            </a:r>
-            <a:r>
-              <a:rPr lang="en-US" altLang="ko-KR" sz="1200" dirty="0">
-                <a:latin typeface="HY엽서M" panose="02030600000101010101" pitchFamily="18" charset="-127"/>
-                <a:ea typeface="HY엽서M" panose="02030600000101010101" pitchFamily="18" charset="-127"/>
-              </a:rPr>
-              <a:t>/ </a:t>
-            </a:r>
-            <a:r>
-              <a:rPr lang="ko-KR" altLang="en-US" sz="1200" dirty="0">
-                <a:latin typeface="HY엽서M" panose="02030600000101010101" pitchFamily="18" charset="-127"/>
-                <a:ea typeface="HY엽서M" panose="02030600000101010101" pitchFamily="18" charset="-127"/>
-              </a:rPr>
-              <a:t>양성자</a:t>
-            </a:r>
-            <a:r>
-              <a:rPr lang="en-US" altLang="ko-KR" sz="1200" dirty="0">
-                <a:latin typeface="HY엽서M" panose="02030600000101010101" pitchFamily="18" charset="-127"/>
-                <a:ea typeface="HY엽서M" panose="02030600000101010101" pitchFamily="18" charset="-127"/>
-              </a:rPr>
-              <a:t>.</a:t>
-            </a:r>
-            <a:r>
-              <a:rPr lang="ko-KR" altLang="en-US" sz="1200" dirty="0">
-                <a:latin typeface="HY엽서M" panose="02030600000101010101" pitchFamily="18" charset="-127"/>
-                <a:ea typeface="HY엽서M" panose="02030600000101010101" pitchFamily="18" charset="-127"/>
-              </a:rPr>
-              <a:t>세기 </a:t>
-            </a:r>
-            <a:r>
-              <a:rPr lang="en-US" altLang="ko-KR" sz="1200" dirty="0">
-                <a:latin typeface="HY엽서M" panose="02030600000101010101" pitchFamily="18" charset="-127"/>
-                <a:ea typeface="HY엽서M" panose="02030600000101010101" pitchFamily="18" charset="-127"/>
-              </a:rPr>
-              <a:t>: </a:t>
-            </a:r>
-            <a:r>
-              <a:rPr lang="en-US" altLang="ko-KR" sz="1200" dirty="0">
-                <a:solidFill>
-                  <a:srgbClr val="0000FF"/>
-                </a:solidFill>
-                <a:latin typeface="HY엽서M" panose="02030600000101010101" pitchFamily="18" charset="-127"/>
-                <a:ea typeface="HY엽서M" panose="02030600000101010101" pitchFamily="18" charset="-127"/>
-              </a:rPr>
-              <a:t/>
-            </a:r>
-            <a:r>
-              <a:rPr lang="ko-KR" altLang="en-US" sz="1200" dirty="0">
-                <a:solidFill>
-                  <a:srgbClr val="0000FF"/>
-                </a:solidFill>
-                <a:latin typeface="HY엽서M" panose="02030600000101010101" pitchFamily="18" charset="-127"/>
-                <a:ea typeface="HY엽서M" panose="02030600000101010101" pitchFamily="18" charset="-127"/>
-              </a:rPr>
-              <a:t/>
-            </a:r>
-            <a:r>
-              <a:rPr lang="en-US" altLang="ko-KR" sz="1200" dirty="0">
-                <a:solidFill>
-                  <a:srgbClr val="0000FF"/>
-                </a:solidFill>
-                <a:latin typeface="HY엽서M" panose="02030600000101010101" pitchFamily="18" charset="-127"/>
-                <a:ea typeface="HY엽서M" panose="02030600000101010101" pitchFamily="18" charset="-127"/>
-              </a:rPr>
-              <a:t/>
-            </a:r>
-            <a:r>
-              <a:rPr lang="ko-KR" altLang="en-US" sz="1200" dirty="0">
-                <a:solidFill>
-                  <a:srgbClr val="0000FF"/>
-                </a:solidFill>
-                <a:latin typeface="HY엽서M" panose="02030600000101010101" pitchFamily="18" charset="-127"/>
-                <a:ea typeface="HY엽서M" panose="02030600000101010101" pitchFamily="18" charset="-127"/>
-              </a:rPr>
-              <a:t/>
-            </a:r>
-            <a:endParaRPr lang="en-US" altLang="ko-KR" sz="1200" dirty="0">
-              <a:solidFill>
-                <a:srgbClr val="0000FF"/>
-              </a:solidFill>
-              <a:latin typeface="HY엽서M" panose="02030600000101010101" pitchFamily="18" charset="-127"/>
-              <a:ea typeface="HY엽서M" panose="02030600000101010101" pitchFamily="18" charset="-127"/>
-            </a:endParaRPr>
-          </a:p>
-          <a:p>
-            <a:r>
-              <a:rPr lang="ko-KR" altLang="en-US" sz="1200" dirty="0" err="1">
-                <a:latin typeface="HY엽서M" panose="02030600000101010101" pitchFamily="18" charset="-127"/>
-                <a:ea typeface="HY엽서M" panose="02030600000101010101" pitchFamily="18" charset="-127"/>
-              </a:rPr>
-              <a:t>암통원비</a:t>
-            </a:r>
-            <a:r>
-              <a:rPr lang="ko-KR" altLang="en-US" sz="1200" dirty="0">
-                <a:latin typeface="HY엽서M" panose="02030600000101010101" pitchFamily="18" charset="-127"/>
-                <a:ea typeface="HY엽서M" panose="02030600000101010101" pitchFamily="18" charset="-127"/>
-              </a:rPr>
-              <a:t> </a:t>
-            </a:r>
-            <a:r>
-              <a:rPr lang="en-US" altLang="ko-KR" sz="1200" dirty="0">
-                <a:latin typeface="HY엽서M" panose="02030600000101010101" pitchFamily="18" charset="-127"/>
-                <a:ea typeface="HY엽서M" panose="02030600000101010101" pitchFamily="18" charset="-127"/>
-              </a:rPr>
-              <a:t>: </a:t>
-            </a:r>
-            <a:r>
-              <a:rPr lang="ko-KR" altLang="en-US" sz="1200" dirty="0">
-                <a:latin typeface="HY엽서M" panose="02030600000101010101" pitchFamily="18" charset="-127"/>
-                <a:ea typeface="HY엽서M" panose="02030600000101010101" pitchFamily="18" charset="-127"/>
-              </a:rPr>
-              <a:t> </a:t>
-            </a:r>
-            <a:r>
-              <a:rPr lang="ko-KR" altLang="en-US" sz="1200" dirty="0" err="1">
-                <a:latin typeface="HY엽서M" panose="02030600000101010101" pitchFamily="18" charset="-127"/>
-                <a:ea typeface="HY엽서M" panose="02030600000101010101" pitchFamily="18" charset="-127"/>
-              </a:rPr>
-              <a:t/>
-            </a:r>
-            <a:r>
-              <a:rPr lang="ko-KR" altLang="en-US" sz="1200" dirty="0">
-                <a:latin typeface="HY엽서M" panose="02030600000101010101" pitchFamily="18" charset="-127"/>
-                <a:ea typeface="HY엽서M" panose="02030600000101010101" pitchFamily="18" charset="-127"/>
-              </a:rPr>
-              <a:t> </a:t>
-            </a:r>
-            <a:r>
-              <a:rPr lang="en-US" altLang="ko-KR" sz="1200" dirty="0">
-                <a:latin typeface="HY엽서M" panose="02030600000101010101" pitchFamily="18" charset="-127"/>
-                <a:ea typeface="HY엽서M" panose="02030600000101010101" pitchFamily="18" charset="-127"/>
-              </a:rPr>
-              <a:t/>
-            </a:r>
-            <a:r>
-              <a:rPr lang="ko-KR" altLang="en-US" sz="1200" dirty="0">
-                <a:latin typeface="HY엽서M" panose="02030600000101010101" pitchFamily="18" charset="-127"/>
-                <a:ea typeface="HY엽서M" panose="02030600000101010101" pitchFamily="18" charset="-127"/>
-              </a:rPr>
-              <a:t/>
-            </a:r>
-            <a:endParaRPr lang="en-US" altLang="ko-KR" sz="1200" dirty="0">
-              <a:latin typeface="HY엽서M" panose="02030600000101010101" pitchFamily="18" charset="-127"/>
-              <a:ea typeface="HY엽서M" panose="02030600000101010101" pitchFamily="18" charset="-127"/>
-            </a:endParaRPr>
-          </a:p>
-          <a:p>
-            <a:r>
-              <a:rPr lang="ko-KR" altLang="en-US" sz="1200" dirty="0">
-                <a:latin typeface="HY엽서M" panose="02030600000101010101" pitchFamily="18" charset="-127"/>
-                <a:ea typeface="HY엽서M" panose="02030600000101010101" pitchFamily="18" charset="-127"/>
-              </a:rPr>
-              <a:t>다빈치로봇수술비 </a:t>
-            </a:r>
-            <a:r>
-              <a:rPr lang="en-US" altLang="ko-KR" sz="1200" dirty="0">
-                <a:latin typeface="HY엽서M" panose="02030600000101010101" pitchFamily="18" charset="-127"/>
-                <a:ea typeface="HY엽서M" panose="02030600000101010101" pitchFamily="18" charset="-127"/>
-              </a:rPr>
-              <a:t>: </a:t>
-            </a:r>
-            <a:r>
-              <a:rPr lang="en-US" altLang="ko-KR" sz="1200" dirty="0">
-                <a:solidFill>
-                  <a:srgbClr val="0000FF"/>
-                </a:solidFill>
-                <a:latin typeface="HY엽서M" panose="02030600000101010101" pitchFamily="18" charset="-127"/>
-                <a:ea typeface="HY엽서M" panose="02030600000101010101" pitchFamily="18" charset="-127"/>
-              </a:rPr>
-              <a:t/>
-            </a:r>
-            <a:r>
-              <a:rPr lang="ko-KR" altLang="en-US" sz="1200" dirty="0">
-                <a:solidFill>
-                  <a:srgbClr val="0000FF"/>
-                </a:solidFill>
-                <a:latin typeface="HY엽서M" panose="02030600000101010101" pitchFamily="18" charset="-127"/>
-                <a:ea typeface="HY엽서M" panose="02030600000101010101" pitchFamily="18" charset="-127"/>
-              </a:rPr>
-              <a:t/>
-            </a:r>
-            <a:endParaRPr lang="en-US" altLang="ko-KR" sz="1200" dirty="0">
-              <a:solidFill>
-                <a:srgbClr val="0000FF"/>
-              </a:solidFill>
-              <a:latin typeface="HY엽서M" panose="02030600000101010101" pitchFamily="18" charset="-127"/>
-              <a:ea typeface="HY엽서M" panose="02030600000101010101" pitchFamily="18" charset="-127"/>
-            </a:endParaRPr>
           </a:p>
         </p:txBody>
       </p:sp>
@@ -7581,15 +6907,13 @@
               </a:ext>
             </a:extLst>
           </p:cNvPr>
-          <p:cNvSpPr txBox="1">
-            <a:spLocks noGrp="1" noRot="1" noMove="1" noResize="1" noEditPoints="1" noAdjustHandles="1" noChangeArrowheads="1" noChangeShapeType="1"/>
-          </p:cNvSpPr>
+          <p:cNvSpPr txBox="1"/>
           <p:nvPr/>
         </p:nvSpPr>
         <p:spPr>
           <a:xfrm>
             <a:off x="109959" y="5649932"/>
-            <a:ext cx="1621742" cy="1877437"/>
+            <a:ext cx="1621742" cy="1938992"/>
           </a:xfrm>
           <a:prstGeom prst="rect">
             <a:avLst/>
@@ -7617,14 +6941,39 @@
                 <a:latin typeface="HY엽서M" panose="02030600000101010101" pitchFamily="18" charset="-127"/>
                 <a:ea typeface="HY엽서M" panose="02030600000101010101" pitchFamily="18" charset="-127"/>
               </a:rPr>
-              <a:t>: </a:t>
-            </a:r>
+              <a:t>:</a:t>
+            </a:r>
+          </a:p>
+          <a:p>
             <a:r>
               <a:rPr lang="ko-KR" altLang="en-US" sz="1200" dirty="0">
                 <a:latin typeface="HY엽서M" panose="02030600000101010101" pitchFamily="18" charset="-127"/>
                 <a:ea typeface="HY엽서M" panose="02030600000101010101" pitchFamily="18" charset="-127"/>
               </a:rPr>
-              <a:t/>
+              <a:t>종합병원수술</a:t>
+            </a:r>
+            <a:r>
+              <a:rPr lang="en-US" altLang="ko-KR" sz="1200" dirty="0">
+                <a:latin typeface="HY엽서M" panose="02030600000101010101" pitchFamily="18" charset="-127"/>
+                <a:ea typeface="HY엽서M" panose="02030600000101010101" pitchFamily="18" charset="-127"/>
+              </a:rPr>
+              <a:t> : </a:t>
+            </a:r>
+          </a:p>
+          <a:p>
+            <a:r>
+              <a:rPr lang="en-US" altLang="ko-KR" sz="1200" dirty="0">
+                <a:latin typeface="HY엽서M" panose="02030600000101010101" pitchFamily="18" charset="-127"/>
+                <a:ea typeface="HY엽서M" panose="02030600000101010101" pitchFamily="18" charset="-127"/>
+              </a:rPr>
+              <a:t>1~5</a:t>
+            </a:r>
+            <a:r>
+              <a:rPr lang="ko-KR" altLang="en-US" sz="1200" dirty="0">
+                <a:latin typeface="HY엽서M" panose="02030600000101010101" pitchFamily="18" charset="-127"/>
+                <a:ea typeface="HY엽서M" panose="02030600000101010101" pitchFamily="18" charset="-127"/>
+              </a:rPr>
+              <a:t>종 수술비</a:t>
             </a:r>
             <a:endParaRPr lang="en-US" altLang="ko-KR" sz="1200" dirty="0">
               <a:latin typeface="HY엽서M" panose="02030600000101010101" pitchFamily="18" charset="-127"/>
@@ -7633,72 +6982,25 @@
           </a:p>
           <a:p>
             <a:r>
-              <a:rPr lang="ko-KR" altLang="en-US" sz="1200" dirty="0">
-                <a:latin typeface="HY엽서M" panose="02030600000101010101" pitchFamily="18" charset="-127"/>
-                <a:ea typeface="HY엽서M" panose="02030600000101010101" pitchFamily="18" charset="-127"/>
-              </a:rPr>
-              <a:t>종합병원수술</a:t>
-            </a:r>
-            <a:r>
-              <a:rPr lang="en-US" altLang="ko-KR" sz="1200" dirty="0">
-                <a:latin typeface="HY엽서M" panose="02030600000101010101" pitchFamily="18" charset="-127"/>
-                <a:ea typeface="HY엽서M" panose="02030600000101010101" pitchFamily="18" charset="-127"/>
-              </a:rPr>
-              <a:t> : </a:t>
-            </a:r>
-            <a:r>
-              <a:rPr lang="en-US" altLang="ko-KR" sz="1100" dirty="0">
-                <a:latin typeface="HY엽서M" panose="02030600000101010101" pitchFamily="18" charset="-127"/>
-                <a:ea typeface="HY엽서M" panose="02030600000101010101" pitchFamily="18" charset="-127"/>
-              </a:rPr>
-              <a:t/>
-            </a:r>
-            <a:r>
-              <a:rPr lang="ko-KR" altLang="en-US" sz="1100" dirty="0">
-                <a:latin typeface="HY엽서M" panose="02030600000101010101" pitchFamily="18" charset="-127"/>
-                <a:ea typeface="HY엽서M" panose="02030600000101010101" pitchFamily="18" charset="-127"/>
-              </a:rPr>
-              <a:t/>
-            </a:r>
-            <a:endParaRPr lang="en-US" altLang="ko-KR" sz="1100" dirty="0">
-              <a:latin typeface="HY엽서M" panose="02030600000101010101" pitchFamily="18" charset="-127"/>
-              <a:ea typeface="HY엽서M" panose="02030600000101010101" pitchFamily="18" charset="-127"/>
-            </a:endParaRPr>
-          </a:p>
-          <a:p>
-            <a:r>
-              <a:rPr lang="en-US" altLang="ko-KR" sz="1200" dirty="0">
-                <a:latin typeface="HY엽서M" panose="02030600000101010101" pitchFamily="18" charset="-127"/>
-                <a:ea typeface="HY엽서M" panose="02030600000101010101" pitchFamily="18" charset="-127"/>
-              </a:rPr>
-              <a:t>1~5</a:t>
-            </a:r>
-            <a:r>
-              <a:rPr lang="ko-KR" altLang="en-US" sz="1200" dirty="0">
-                <a:latin typeface="HY엽서M" panose="02030600000101010101" pitchFamily="18" charset="-127"/>
-                <a:ea typeface="HY엽서M" panose="02030600000101010101" pitchFamily="18" charset="-127"/>
-              </a:rPr>
-              <a:t>종 수술비</a:t>
-            </a:r>
-            <a:endParaRPr lang="en-US" altLang="ko-KR" sz="1200" dirty="0">
-              <a:latin typeface="HY엽서M" panose="02030600000101010101" pitchFamily="18" charset="-127"/>
-              <a:ea typeface="HY엽서M" panose="02030600000101010101" pitchFamily="18" charset="-127"/>
-            </a:endParaRPr>
-          </a:p>
-          <a:p>
-            <a:r>
               <a:rPr lang="en-US" altLang="ko-KR" sz="900" dirty="0">
                 <a:latin typeface="HY엽서M" panose="02030600000101010101" pitchFamily="18" charset="-127"/>
                 <a:ea typeface="HY엽서M" panose="02030600000101010101" pitchFamily="18" charset="-127"/>
               </a:rPr>
-              <a:t>(      /     /     /     /      )</a:t>
+              <a:t>(      /      /      /      / </a:t>
+            </a:r>
+            <a:r>
+              <a:rPr lang="en-US" altLang="ko-KR" sz="800" dirty="0">
+                <a:latin typeface="HY엽서M" panose="02030600000101010101" pitchFamily="18" charset="-127"/>
+                <a:ea typeface="HY엽서M" panose="02030600000101010101" pitchFamily="18" charset="-127"/>
+              </a:rPr>
+              <a:t>     </a:t>
             </a:r>
             <a:r>
               <a:rPr lang="en-US" altLang="ko-KR" sz="1000" dirty="0">
                 <a:latin typeface="HY엽서M" panose="02030600000101010101" pitchFamily="18" charset="-127"/>
                 <a:ea typeface="HY엽서M" panose="02030600000101010101" pitchFamily="18" charset="-127"/>
               </a:rPr>
-              <a:t/>
+              <a:t>)</a:t>
             </a:r>
           </a:p>
           <a:p>
@@ -7737,69 +7039,47 @@
                 <a:latin typeface="HY엽서M" panose="02030600000101010101" pitchFamily="18" charset="-127"/>
                 <a:ea typeface="HY엽서M" panose="02030600000101010101" pitchFamily="18" charset="-127"/>
               </a:rPr>
+              <a:t>:</a:t>
+            </a:r>
+          </a:p>
+          <a:p>
+            <a:r>
+              <a:rPr lang="ko-KR" altLang="en-US" sz="1000" dirty="0" err="1">
+                <a:latin typeface="HY엽서M" panose="02030600000101010101" pitchFamily="18" charset="-127"/>
+                <a:ea typeface="HY엽서M" panose="02030600000101010101" pitchFamily="18" charset="-127"/>
+              </a:rPr>
+              <a:t>허혈성수술</a:t>
+            </a:r>
+            <a:r>
+              <a:rPr lang="ko-KR" altLang="en-US" sz="1000" dirty="0">
+                <a:latin typeface="HY엽서M" panose="02030600000101010101" pitchFamily="18" charset="-127"/>
+                <a:ea typeface="HY엽서M" panose="02030600000101010101" pitchFamily="18" charset="-127"/>
+              </a:rPr>
+              <a:t> </a:t>
+            </a:r>
+            <a:r>
+              <a:rPr lang="en-US" altLang="ko-KR" sz="1000" dirty="0">
+                <a:latin typeface="HY엽서M" panose="02030600000101010101" pitchFamily="18" charset="-127"/>
+                <a:ea typeface="HY엽서M" panose="02030600000101010101" pitchFamily="18" charset="-127"/>
+              </a:rPr>
               <a:t>: </a:t>
             </a:r>
+          </a:p>
+          <a:p>
             <a:r>
               <a:rPr lang="ko-KR" altLang="en-US" sz="1000" dirty="0">
                 <a:latin typeface="HY엽서M" panose="02030600000101010101" pitchFamily="18" charset="-127"/>
                 <a:ea typeface="HY엽서M" panose="02030600000101010101" pitchFamily="18" charset="-127"/>
               </a:rPr>
-              <a:t/>
-            </a:r>
-            <a:endParaRPr lang="en-US" altLang="ko-KR" sz="1000" dirty="0">
-              <a:latin typeface="HY엽서M" panose="02030600000101010101" pitchFamily="18" charset="-127"/>
-              <a:ea typeface="HY엽서M" panose="02030600000101010101" pitchFamily="18" charset="-127"/>
-            </a:endParaRPr>
-          </a:p>
-          <a:p>
-            <a:r>
-              <a:rPr lang="ko-KR" altLang="en-US" sz="1000" dirty="0" err="1">
-                <a:latin typeface="HY엽서M" panose="02030600000101010101" pitchFamily="18" charset="-127"/>
-                <a:ea typeface="HY엽서M" panose="02030600000101010101" pitchFamily="18" charset="-127"/>
-              </a:rPr>
-              <a:t>허혈성수술</a:t>
-            </a:r>
-            <a:r>
-              <a:rPr lang="ko-KR" altLang="en-US" sz="1000" dirty="0">
-                <a:latin typeface="HY엽서M" panose="02030600000101010101" pitchFamily="18" charset="-127"/>
-                <a:ea typeface="HY엽서M" panose="02030600000101010101" pitchFamily="18" charset="-127"/>
-              </a:rPr>
-              <a:t> </a:t>
+              <a:t>심장 수술 </a:t>
             </a:r>
             <a:r>
               <a:rPr lang="en-US" altLang="ko-KR" sz="1000" dirty="0">
                 <a:latin typeface="HY엽서M" panose="02030600000101010101" pitchFamily="18" charset="-127"/>
                 <a:ea typeface="HY엽서M" panose="02030600000101010101" pitchFamily="18" charset="-127"/>
               </a:rPr>
-              <a:t>: </a:t>
-            </a:r>
-          </a:p>
-          <a:p>
-            <a:r>
-              <a:rPr lang="ko-KR" altLang="en-US" sz="1000" dirty="0">
-                <a:latin typeface="HY엽서M" panose="02030600000101010101" pitchFamily="18" charset="-127"/>
-                <a:ea typeface="HY엽서M" panose="02030600000101010101" pitchFamily="18" charset="-127"/>
-              </a:rPr>
-              <a:t>심장 수술 </a:t>
-            </a:r>
-            <a:r>
-              <a:rPr lang="en-US" altLang="ko-KR" sz="1000" dirty="0">
-                <a:latin typeface="HY엽서M" panose="02030600000101010101" pitchFamily="18" charset="-127"/>
-                <a:ea typeface="HY엽서M" panose="02030600000101010101" pitchFamily="18" charset="-127"/>
-              </a:rPr>
-              <a:t>: </a:t>
-            </a:r>
-            <a:r>
-              <a:rPr lang="ko-KR" altLang="en-US" sz="1000" dirty="0">
-                <a:latin typeface="HY엽서M" panose="02030600000101010101" pitchFamily="18" charset="-127"/>
-                <a:ea typeface="HY엽서M" panose="02030600000101010101" pitchFamily="18" charset="-127"/>
-              </a:rPr>
-              <a:t/>
-            </a:r>
-            <a:endParaRPr lang="en-US" altLang="ko-KR" sz="1000" dirty="0">
-              <a:latin typeface="HY엽서M" panose="02030600000101010101" pitchFamily="18" charset="-127"/>
-              <a:ea typeface="HY엽서M" panose="02030600000101010101" pitchFamily="18" charset="-127"/>
-            </a:endParaRPr>
+              <a:t>:</a:t>
+            </a:r>
           </a:p>
           <a:p>
             <a:r>
@@ -7885,15 +7165,13 @@
               </a:ext>
             </a:extLst>
           </p:cNvPr>
-          <p:cNvSpPr txBox="1">
-            <a:spLocks noGrp="1" noRot="1" noMove="1" noResize="1" noEditPoints="1" noAdjustHandles="1" noChangeArrowheads="1" noChangeShapeType="1"/>
-          </p:cNvSpPr>
+          <p:cNvSpPr txBox="1"/>
           <p:nvPr/>
         </p:nvSpPr>
         <p:spPr>
           <a:xfrm>
             <a:off x="1729621" y="5691134"/>
-            <a:ext cx="1621742" cy="1877437"/>
+            <a:ext cx="1621742" cy="1792798"/>
           </a:xfrm>
           <a:prstGeom prst="rect">
             <a:avLst/>
@@ -7921,14 +7199,39 @@
                 <a:latin typeface="HY엽서M" panose="02030600000101010101" pitchFamily="18" charset="-127"/>
                 <a:ea typeface="HY엽서M" panose="02030600000101010101" pitchFamily="18" charset="-127"/>
               </a:rPr>
-              <a:t>: </a:t>
-            </a:r>
+              <a:t>:</a:t>
+            </a:r>
+          </a:p>
+          <a:p>
             <a:r>
               <a:rPr lang="ko-KR" altLang="en-US" sz="1200" dirty="0">
                 <a:latin typeface="HY엽서M" panose="02030600000101010101" pitchFamily="18" charset="-127"/>
                 <a:ea typeface="HY엽서M" panose="02030600000101010101" pitchFamily="18" charset="-127"/>
               </a:rPr>
-              <a:t/>
+              <a:t>종합병원수술 </a:t>
+            </a:r>
+            <a:r>
+              <a:rPr lang="en-US" altLang="ko-KR" sz="1200" dirty="0">
+                <a:latin typeface="HY엽서M" panose="02030600000101010101" pitchFamily="18" charset="-127"/>
+                <a:ea typeface="HY엽서M" panose="02030600000101010101" pitchFamily="18" charset="-127"/>
+              </a:rPr>
+              <a:t>:  </a:t>
+            </a:r>
+          </a:p>
+          <a:p>
+            <a:r>
+              <a:rPr lang="en-US" altLang="ko-KR" sz="1200" dirty="0">
+                <a:latin typeface="HY엽서M" panose="02030600000101010101" pitchFamily="18" charset="-127"/>
+                <a:ea typeface="HY엽서M" panose="02030600000101010101" pitchFamily="18" charset="-127"/>
+              </a:rPr>
+              <a:t>1~5</a:t>
+            </a:r>
+            <a:r>
+              <a:rPr lang="ko-KR" altLang="en-US" sz="1200" dirty="0">
+                <a:latin typeface="HY엽서M" panose="02030600000101010101" pitchFamily="18" charset="-127"/>
+                <a:ea typeface="HY엽서M" panose="02030600000101010101" pitchFamily="18" charset="-127"/>
+              </a:rPr>
+              <a:t>종 수술비</a:t>
             </a:r>
             <a:endParaRPr lang="en-US" altLang="ko-KR" sz="1200" dirty="0">
               <a:latin typeface="HY엽서M" panose="02030600000101010101" pitchFamily="18" charset="-127"/>
@@ -7937,11 +7240,96 @@
           </a:p>
           <a:p>
             <a:r>
+              <a:rPr lang="en-US" altLang="ko-KR" sz="900" dirty="0">
+                <a:latin typeface="HY엽서M" panose="02030600000101010101" pitchFamily="18" charset="-127"/>
+                <a:ea typeface="HY엽서M" panose="02030600000101010101" pitchFamily="18" charset="-127"/>
+              </a:rPr>
+              <a:t>(      /      /      /      / </a:t>
+            </a:r>
+            <a:r>
+              <a:rPr lang="en-US" altLang="ko-KR" sz="800" dirty="0">
+                <a:latin typeface="HY엽서M" panose="02030600000101010101" pitchFamily="18" charset="-127"/>
+                <a:ea typeface="HY엽서M" panose="02030600000101010101" pitchFamily="18" charset="-127"/>
+              </a:rPr>
+              <a:t>     </a:t>
+            </a:r>
+            <a:r>
+              <a:rPr lang="en-US" altLang="ko-KR" sz="1000" dirty="0">
+                <a:latin typeface="HY엽서M" panose="02030600000101010101" pitchFamily="18" charset="-127"/>
+                <a:ea typeface="HY엽서M" panose="02030600000101010101" pitchFamily="18" charset="-127"/>
+              </a:rPr>
+              <a:t>)</a:t>
+            </a:r>
+          </a:p>
+          <a:p>
+            <a:r>
+              <a:rPr lang="ko-KR" altLang="en-US" sz="1000" dirty="0">
+                <a:latin typeface="HY엽서M" panose="02030600000101010101" pitchFamily="18" charset="-127"/>
+                <a:ea typeface="HY엽서M" panose="02030600000101010101" pitchFamily="18" charset="-127"/>
+              </a:rPr>
+              <a:t>골절수술 </a:t>
+            </a:r>
+            <a:r>
+              <a:rPr lang="en-US" altLang="ko-KR" sz="1000" dirty="0">
+                <a:latin typeface="HY엽서M" panose="02030600000101010101" pitchFamily="18" charset="-127"/>
+                <a:ea typeface="HY엽서M" panose="02030600000101010101" pitchFamily="18" charset="-127"/>
+              </a:rPr>
+              <a:t>: </a:t>
+            </a:r>
+          </a:p>
+          <a:p>
+            <a:r>
+              <a:rPr lang="en-US" altLang="ko-KR" sz="1000" dirty="0">
+                <a:latin typeface="HY엽서M" panose="02030600000101010101" pitchFamily="18" charset="-127"/>
+                <a:ea typeface="HY엽서M" panose="02030600000101010101" pitchFamily="18" charset="-127"/>
+              </a:rPr>
+              <a:t>5</a:t>
+            </a:r>
+            <a:r>
+              <a:rPr lang="ko-KR" altLang="en-US" sz="1000" dirty="0" err="1">
+                <a:latin typeface="HY엽서M" panose="02030600000101010101" pitchFamily="18" charset="-127"/>
+                <a:ea typeface="HY엽서M" panose="02030600000101010101" pitchFamily="18" charset="-127"/>
+              </a:rPr>
+              <a:t>대골절수술</a:t>
+            </a:r>
+            <a:r>
+              <a:rPr lang="ko-KR" altLang="en-US" sz="1000" dirty="0">
+                <a:latin typeface="HY엽서M" panose="02030600000101010101" pitchFamily="18" charset="-127"/>
+                <a:ea typeface="HY엽서M" panose="02030600000101010101" pitchFamily="18" charset="-127"/>
+              </a:rPr>
+              <a:t> </a:t>
+            </a:r>
+            <a:r>
+              <a:rPr lang="en-US" altLang="ko-KR" sz="1000" dirty="0">
+                <a:latin typeface="HY엽서M" panose="02030600000101010101" pitchFamily="18" charset="-127"/>
+                <a:ea typeface="HY엽서M" panose="02030600000101010101" pitchFamily="18" charset="-127"/>
+              </a:rPr>
+              <a:t>: </a:t>
+            </a:r>
+          </a:p>
+          <a:p>
+            <a:r>
+              <a:rPr lang="ko-KR" altLang="en-US" sz="1000" dirty="0">
+                <a:latin typeface="HY엽서M" panose="02030600000101010101" pitchFamily="18" charset="-127"/>
+                <a:ea typeface="HY엽서M" panose="02030600000101010101" pitchFamily="18" charset="-127"/>
+              </a:rPr>
+              <a:t>화상수술 </a:t>
+            </a:r>
+            <a:r>
+              <a:rPr lang="en-US" altLang="ko-KR" sz="1000" dirty="0">
+                <a:latin typeface="HY엽서M" panose="02030600000101010101" pitchFamily="18" charset="-127"/>
+                <a:ea typeface="HY엽서M" panose="02030600000101010101" pitchFamily="18" charset="-127"/>
+              </a:rPr>
+              <a:t>: </a:t>
+            </a:r>
+          </a:p>
+          <a:p>
+            <a:r>
               <a:rPr lang="ko-KR" altLang="en-US" sz="1050" dirty="0">
                 <a:latin typeface="HY엽서M" panose="02030600000101010101" pitchFamily="18" charset="-127"/>
                 <a:ea typeface="HY엽서M" panose="02030600000101010101" pitchFamily="18" charset="-127"/>
               </a:rPr>
-              <a:t>상급종합병원수술 </a:t>
+              <a:t>중대상해수술 </a:t>
             </a:r>
             <a:r>
               <a:rPr lang="en-US" altLang="ko-KR" sz="1050" dirty="0">
@@ -7950,178 +7338,6 @@
               </a:rPr>
               <a:t>: </a:t>
             </a:r>
-            <a:r>
-              <a:rPr lang="ko-KR" altLang="en-US" sz="1050" dirty="0">
-                <a:latin typeface="HY엽서M" panose="02030600000101010101" pitchFamily="18" charset="-127"/>
-                <a:ea typeface="HY엽서M" panose="02030600000101010101" pitchFamily="18" charset="-127"/>
-              </a:rPr>
-              <a:t/>
-            </a:r>
-            <a:r>
-              <a:rPr lang="en-US" altLang="ko-KR" sz="1050" dirty="0">
-                <a:latin typeface="HY엽서M" panose="02030600000101010101" pitchFamily="18" charset="-127"/>
-                <a:ea typeface="HY엽서M" panose="02030600000101010101" pitchFamily="18" charset="-127"/>
-              </a:rPr>
-              <a:t>  </a:t>
-            </a:r>
-          </a:p>
-          <a:p>
-            <a:r>
-              <a:rPr lang="en-US" altLang="ko-KR" sz="1200" dirty="0">
-                <a:latin typeface="HY엽서M" panose="02030600000101010101" pitchFamily="18" charset="-127"/>
-                <a:ea typeface="HY엽서M" panose="02030600000101010101" pitchFamily="18" charset="-127"/>
-              </a:rPr>
-              <a:t>1~5</a:t>
-            </a:r>
-            <a:r>
-              <a:rPr lang="ko-KR" altLang="en-US" sz="1200" dirty="0">
-                <a:latin typeface="HY엽서M" panose="02030600000101010101" pitchFamily="18" charset="-127"/>
-                <a:ea typeface="HY엽서M" panose="02030600000101010101" pitchFamily="18" charset="-127"/>
-              </a:rPr>
-              <a:t>종 수술비</a:t>
-            </a:r>
-            <a:endParaRPr lang="en-US" altLang="ko-KR" sz="1200" dirty="0">
-              <a:latin typeface="HY엽서M" panose="02030600000101010101" pitchFamily="18" charset="-127"/>
-              <a:ea typeface="HY엽서M" panose="02030600000101010101" pitchFamily="18" charset="-127"/>
-            </a:endParaRPr>
-          </a:p>
-          <a:p>
-            <a:r>
-              <a:rPr lang="en-US" altLang="ko-KR" sz="900" dirty="0">
-                <a:latin typeface="HY엽서M" panose="02030600000101010101" pitchFamily="18" charset="-127"/>
-                <a:ea typeface="HY엽서M" panose="02030600000101010101" pitchFamily="18" charset="-127"/>
-              </a:rPr>
-              <a:t>(      /     /     /     /      )</a:t>
-            </a:r>
-            <a:r>
-              <a:rPr lang="en-US" altLang="ko-KR" sz="1000" dirty="0">
-                <a:latin typeface="HY엽서M" panose="02030600000101010101" pitchFamily="18" charset="-127"/>
-                <a:ea typeface="HY엽서M" panose="02030600000101010101" pitchFamily="18" charset="-127"/>
-              </a:rPr>
-              <a:t/>
-            </a:r>
-          </a:p>
-          <a:p>
-            <a:r>
-              <a:rPr lang="ko-KR" altLang="en-US" sz="1000" dirty="0">
-                <a:latin typeface="HY엽서M" panose="02030600000101010101" pitchFamily="18" charset="-127"/>
-                <a:ea typeface="HY엽서M" panose="02030600000101010101" pitchFamily="18" charset="-127"/>
-              </a:rPr>
-              <a:t>골절수술 </a:t>
-            </a:r>
-            <a:r>
-              <a:rPr lang="en-US" altLang="ko-KR" sz="1000" dirty="0">
-                <a:latin typeface="HY엽서M" panose="02030600000101010101" pitchFamily="18" charset="-127"/>
-                <a:ea typeface="HY엽서M" panose="02030600000101010101" pitchFamily="18" charset="-127"/>
-              </a:rPr>
-              <a:t>: </a:t>
-            </a:r>
-            <a:r>
-              <a:rPr lang="ko-KR" altLang="en-US" sz="1000" dirty="0">
-                <a:latin typeface="HY엽서M" panose="02030600000101010101" pitchFamily="18" charset="-127"/>
-                <a:ea typeface="HY엽서M" panose="02030600000101010101" pitchFamily="18" charset="-127"/>
-              </a:rPr>
-              <a:t/>
-            </a:r>
-            <a:endParaRPr lang="en-US" altLang="ko-KR" sz="1000" dirty="0">
-              <a:latin typeface="HY엽서M" panose="02030600000101010101" pitchFamily="18" charset="-127"/>
-              <a:ea typeface="HY엽서M" panose="02030600000101010101" pitchFamily="18" charset="-127"/>
-            </a:endParaRPr>
-          </a:p>
-          <a:p>
-            <a:r>
-              <a:rPr lang="en-US" altLang="ko-KR" sz="1000" dirty="0">
-                <a:latin typeface="HY엽서M" panose="02030600000101010101" pitchFamily="18" charset="-127"/>
-                <a:ea typeface="HY엽서M" panose="02030600000101010101" pitchFamily="18" charset="-127"/>
-              </a:rPr>
-              <a:t>5</a:t>
-            </a:r>
-            <a:r>
-              <a:rPr lang="ko-KR" altLang="en-US" sz="1000" dirty="0" err="1">
-                <a:latin typeface="HY엽서M" panose="02030600000101010101" pitchFamily="18" charset="-127"/>
-                <a:ea typeface="HY엽서M" panose="02030600000101010101" pitchFamily="18" charset="-127"/>
-              </a:rPr>
-              <a:t>대골절수술</a:t>
-            </a:r>
-            <a:r>
-              <a:rPr lang="ko-KR" altLang="en-US" sz="1000" dirty="0">
-                <a:latin typeface="HY엽서M" panose="02030600000101010101" pitchFamily="18" charset="-127"/>
-                <a:ea typeface="HY엽서M" panose="02030600000101010101" pitchFamily="18" charset="-127"/>
-              </a:rPr>
-              <a:t> </a:t>
-            </a:r>
-            <a:r>
-              <a:rPr lang="en-US" altLang="ko-KR" sz="1000" dirty="0">
-                <a:latin typeface="HY엽서M" panose="02030600000101010101" pitchFamily="18" charset="-127"/>
-                <a:ea typeface="HY엽서M" panose="02030600000101010101" pitchFamily="18" charset="-127"/>
-              </a:rPr>
-              <a:t>: </a:t>
-            </a:r>
-            <a:r>
-              <a:rPr lang="ko-KR" altLang="en-US" sz="1000" dirty="0">
-                <a:latin typeface="HY엽서M" panose="02030600000101010101" pitchFamily="18" charset="-127"/>
-                <a:ea typeface="HY엽서M" panose="02030600000101010101" pitchFamily="18" charset="-127"/>
-              </a:rPr>
-              <a:t/>
-            </a:r>
-            <a:endParaRPr lang="en-US" altLang="ko-KR" sz="1000" dirty="0">
-              <a:latin typeface="HY엽서M" panose="02030600000101010101" pitchFamily="18" charset="-127"/>
-              <a:ea typeface="HY엽서M" panose="02030600000101010101" pitchFamily="18" charset="-127"/>
-            </a:endParaRPr>
-          </a:p>
-          <a:p>
-            <a:r>
-              <a:rPr lang="ko-KR" altLang="en-US" sz="1000" dirty="0">
-                <a:latin typeface="HY엽서M" panose="02030600000101010101" pitchFamily="18" charset="-127"/>
-                <a:ea typeface="HY엽서M" panose="02030600000101010101" pitchFamily="18" charset="-127"/>
-              </a:rPr>
-              <a:t>화상수술 </a:t>
-            </a:r>
-            <a:r>
-              <a:rPr lang="en-US" altLang="ko-KR" sz="1000" dirty="0">
-                <a:latin typeface="HY엽서M" panose="02030600000101010101" pitchFamily="18" charset="-127"/>
-                <a:ea typeface="HY엽서M" panose="02030600000101010101" pitchFamily="18" charset="-127"/>
-              </a:rPr>
-              <a:t>: </a:t>
-            </a:r>
-            <a:r>
-              <a:rPr lang="ko-KR" altLang="en-US" sz="1000" dirty="0">
-                <a:latin typeface="HY엽서M" panose="02030600000101010101" pitchFamily="18" charset="-127"/>
-                <a:ea typeface="HY엽서M" panose="02030600000101010101" pitchFamily="18" charset="-127"/>
-              </a:rPr>
-              <a:t/>
-            </a:r>
-            <a:endParaRPr lang="en-US" altLang="ko-KR" sz="1000" dirty="0">
-              <a:latin typeface="HY엽서M" panose="02030600000101010101" pitchFamily="18" charset="-127"/>
-              <a:ea typeface="HY엽서M" panose="02030600000101010101" pitchFamily="18" charset="-127"/>
-            </a:endParaRPr>
-          </a:p>
-          <a:p>
-            <a:r>
-              <a:rPr lang="ko-KR" altLang="en-US" sz="1050" dirty="0">
-                <a:latin typeface="HY엽서M" panose="02030600000101010101" pitchFamily="18" charset="-127"/>
-                <a:ea typeface="HY엽서M" panose="02030600000101010101" pitchFamily="18" charset="-127"/>
-              </a:rPr>
-              <a:t>중대상해수술 </a:t>
-            </a:r>
-            <a:r>
-              <a:rPr lang="en-US" altLang="ko-KR" sz="1050" dirty="0">
-                <a:latin typeface="HY엽서M" panose="02030600000101010101" pitchFamily="18" charset="-127"/>
-                <a:ea typeface="HY엽서M" panose="02030600000101010101" pitchFamily="18" charset="-127"/>
-              </a:rPr>
-              <a:t>: </a:t>
-            </a:r>
-            <a:r>
-              <a:rPr lang="ko-KR" altLang="en-US" sz="1050" dirty="0">
-                <a:latin typeface="HY엽서M" panose="02030600000101010101" pitchFamily="18" charset="-127"/>
-                <a:ea typeface="HY엽서M" panose="02030600000101010101" pitchFamily="18" charset="-127"/>
-              </a:rPr>
-              <a:t/>
-            </a:r>
-            <a:endParaRPr lang="en-US" altLang="ko-KR" sz="1050" dirty="0">
-              <a:latin typeface="HY엽서M" panose="02030600000101010101" pitchFamily="18" charset="-127"/>
-              <a:ea typeface="HY엽서M" panose="02030600000101010101" pitchFamily="18" charset="-127"/>
-            </a:endParaRPr>
           </a:p>
           <a:p>
             <a:r>
@@ -8184,9 +7400,7 @@
               </a:ext>
             </a:extLst>
           </p:cNvPr>
-          <p:cNvSpPr txBox="1">
-            <a:spLocks noGrp="1" noRot="1" noMove="1" noResize="1" noEditPoints="1" noAdjustHandles="1" noChangeArrowheads="1" noChangeShapeType="1"/>
-          </p:cNvSpPr>
+          <p:cNvSpPr txBox="1"/>
           <p:nvPr/>
         </p:nvSpPr>
         <p:spPr>
@@ -8220,752 +7434,254 @@
                 <a:latin typeface="HY엽서M" panose="02030600000101010101" pitchFamily="18" charset="-127"/>
                 <a:ea typeface="HY엽서M" panose="02030600000101010101" pitchFamily="18" charset="-127"/>
               </a:rPr>
+              <a:t>:             / _____</a:t>
+            </a:r>
+            <a:r>
+              <a:rPr lang="ko-KR" altLang="en-US" sz="1200" dirty="0">
+                <a:latin typeface="HY엽서M" panose="02030600000101010101" pitchFamily="18" charset="-127"/>
+                <a:ea typeface="HY엽서M" panose="02030600000101010101" pitchFamily="18" charset="-127"/>
+              </a:rPr>
+              <a:t>병원일당 </a:t>
+            </a:r>
+            <a:r>
+              <a:rPr lang="en-US" altLang="ko-KR" sz="1200" dirty="0">
+                <a:latin typeface="HY엽서M" panose="02030600000101010101" pitchFamily="18" charset="-127"/>
+                <a:ea typeface="HY엽서M" panose="02030600000101010101" pitchFamily="18" charset="-127"/>
+              </a:rPr>
+              <a:t>:    </a:t>
+            </a:r>
+          </a:p>
+          <a:p>
+            <a:r>
+              <a:rPr lang="ko-KR" altLang="en-US" sz="1200" dirty="0">
+                <a:latin typeface="HY엽서M" panose="02030600000101010101" pitchFamily="18" charset="-127"/>
+                <a:ea typeface="HY엽서M" panose="02030600000101010101" pitchFamily="18" charset="-127"/>
+              </a:rPr>
+              <a:t>상해일당 </a:t>
+            </a:r>
+            <a:r>
+              <a:rPr lang="en-US" altLang="ko-KR" sz="1200" dirty="0">
+                <a:latin typeface="HY엽서M" panose="02030600000101010101" pitchFamily="18" charset="-127"/>
+                <a:ea typeface="HY엽서M" panose="02030600000101010101" pitchFamily="18" charset="-127"/>
+              </a:rPr>
+              <a:t>:             / _____</a:t>
+            </a:r>
+            <a:r>
+              <a:rPr lang="ko-KR" altLang="en-US" sz="1200" dirty="0">
+                <a:latin typeface="HY엽서M" panose="02030600000101010101" pitchFamily="18" charset="-127"/>
+                <a:ea typeface="HY엽서M" panose="02030600000101010101" pitchFamily="18" charset="-127"/>
+              </a:rPr>
+              <a:t>병원일당 </a:t>
+            </a:r>
+            <a:r>
+              <a:rPr lang="en-US" altLang="ko-KR" sz="1200" dirty="0">
+                <a:latin typeface="HY엽서M" panose="02030600000101010101" pitchFamily="18" charset="-127"/>
+                <a:ea typeface="HY엽서M" panose="02030600000101010101" pitchFamily="18" charset="-127"/>
+              </a:rPr>
+              <a:t>:</a:t>
+            </a:r>
+          </a:p>
+          <a:p>
+            <a:r>
+              <a:rPr lang="ko-KR" altLang="en-US" sz="1200" dirty="0" err="1">
+                <a:latin typeface="HY엽서M" panose="02030600000101010101" pitchFamily="18" charset="-127"/>
+                <a:ea typeface="HY엽서M" panose="02030600000101010101" pitchFamily="18" charset="-127"/>
+              </a:rPr>
+              <a:t>질병중환자실</a:t>
+            </a:r>
+            <a:r>
+              <a:rPr lang="ko-KR" altLang="en-US" sz="1200" dirty="0">
+                <a:latin typeface="HY엽서M" panose="02030600000101010101" pitchFamily="18" charset="-127"/>
+                <a:ea typeface="HY엽서M" panose="02030600000101010101" pitchFamily="18" charset="-127"/>
+              </a:rPr>
+              <a:t> </a:t>
+            </a:r>
+            <a:r>
+              <a:rPr lang="en-US" altLang="ko-KR" sz="1200" dirty="0">
+                <a:latin typeface="HY엽서M" panose="02030600000101010101" pitchFamily="18" charset="-127"/>
+                <a:ea typeface="HY엽서M" panose="02030600000101010101" pitchFamily="18" charset="-127"/>
+              </a:rPr>
+              <a:t>:       / </a:t>
+            </a:r>
+            <a:r>
+              <a:rPr lang="ko-KR" altLang="en-US" sz="1200" dirty="0" err="1">
+                <a:latin typeface="HY엽서M" panose="02030600000101010101" pitchFamily="18" charset="-127"/>
+                <a:ea typeface="HY엽서M" panose="02030600000101010101" pitchFamily="18" charset="-127"/>
+              </a:rPr>
+              <a:t>상해중환자실</a:t>
+            </a:r>
+            <a:r>
+              <a:rPr lang="ko-KR" altLang="en-US" sz="1200" dirty="0">
+                <a:latin typeface="HY엽서M" panose="02030600000101010101" pitchFamily="18" charset="-127"/>
+                <a:ea typeface="HY엽서M" panose="02030600000101010101" pitchFamily="18" charset="-127"/>
+              </a:rPr>
+              <a:t> </a:t>
+            </a:r>
+            <a:r>
+              <a:rPr lang="en-US" altLang="ko-KR" sz="1200" dirty="0">
+                <a:latin typeface="HY엽서M" panose="02030600000101010101" pitchFamily="18" charset="-127"/>
+                <a:ea typeface="HY엽서M" panose="02030600000101010101" pitchFamily="18" charset="-127"/>
+              </a:rPr>
+              <a:t>:  </a:t>
+            </a:r>
+          </a:p>
+          <a:p>
+            <a:r>
+              <a:rPr lang="en-US" altLang="ko-KR" sz="1200" dirty="0">
+                <a:latin typeface="HY엽서M" panose="02030600000101010101" pitchFamily="18" charset="-127"/>
+                <a:ea typeface="HY엽서M" panose="02030600000101010101" pitchFamily="18" charset="-127"/>
+              </a:rPr>
+              <a:t>1</a:t>
+            </a:r>
+            <a:r>
+              <a:rPr lang="ko-KR" altLang="en-US" sz="1200" dirty="0">
+                <a:latin typeface="HY엽서M" panose="02030600000101010101" pitchFamily="18" charset="-127"/>
+                <a:ea typeface="HY엽서M" panose="02030600000101010101" pitchFamily="18" charset="-127"/>
+              </a:rPr>
+              <a:t>인실 상급병원일당 </a:t>
+            </a:r>
+            <a:r>
+              <a:rPr lang="en-US" altLang="ko-KR" sz="1200" dirty="0">
+                <a:latin typeface="HY엽서M" panose="02030600000101010101" pitchFamily="18" charset="-127"/>
+                <a:ea typeface="HY엽서M" panose="02030600000101010101" pitchFamily="18" charset="-127"/>
+              </a:rPr>
               <a:t>: </a:t>
             </a:r>
+          </a:p>
+          <a:p>
+            <a:r>
+              <a:rPr lang="en-US" altLang="ko-KR" sz="1200" dirty="0">
+                <a:latin typeface="HY엽서M" panose="02030600000101010101" pitchFamily="18" charset="-127"/>
+                <a:ea typeface="HY엽서M" panose="02030600000101010101" pitchFamily="18" charset="-127"/>
+              </a:rPr>
+              <a:t>1</a:t>
+            </a:r>
             <a:r>
               <a:rPr lang="ko-KR" altLang="en-US" sz="1200" dirty="0">
                 <a:latin typeface="HY엽서M" panose="02030600000101010101" pitchFamily="18" charset="-127"/>
                 <a:ea typeface="HY엽서M" panose="02030600000101010101" pitchFamily="18" charset="-127"/>
               </a:rPr>
-              <a:t/>
+              <a:t>인실 종합병원일당 </a:t>
             </a:r>
             <a:r>
               <a:rPr lang="en-US" altLang="ko-KR" sz="1200" dirty="0">
                 <a:latin typeface="HY엽서M" panose="02030600000101010101" pitchFamily="18" charset="-127"/>
                 <a:ea typeface="HY엽서M" panose="02030600000101010101" pitchFamily="18" charset="-127"/>
               </a:rPr>
-              <a:t> / </a:t>
+              <a:t>: </a:t>
+            </a:r>
+          </a:p>
+          <a:p>
+            <a:r>
+              <a:rPr lang="ko-KR" altLang="en-US" sz="1200" dirty="0" err="1">
+                <a:latin typeface="HY엽서M" panose="02030600000101010101" pitchFamily="18" charset="-127"/>
+                <a:ea typeface="HY엽서M" panose="02030600000101010101" pitchFamily="18" charset="-127"/>
+              </a:rPr>
+              <a:t>암일당</a:t>
             </a:r>
             <a:r>
               <a:rPr lang="ko-KR" altLang="en-US" sz="1200" dirty="0">
                 <a:latin typeface="HY엽서M" panose="02030600000101010101" pitchFamily="18" charset="-127"/>
                 <a:ea typeface="HY엽서M" panose="02030600000101010101" pitchFamily="18" charset="-127"/>
               </a:rPr>
-              <a:t>종합병원일당 </a:t>
+              <a:t> </a:t>
             </a:r>
             <a:r>
               <a:rPr lang="en-US" altLang="ko-KR" sz="1200" dirty="0">
                 <a:latin typeface="HY엽서M" panose="02030600000101010101" pitchFamily="18" charset="-127"/>
                 <a:ea typeface="HY엽서M" panose="02030600000101010101" pitchFamily="18" charset="-127"/>
               </a:rPr>
+              <a:t>:          /</a:t>
+            </a:r>
+            <a:r>
+              <a:rPr lang="ko-KR" altLang="en-US" sz="1200" dirty="0">
+                <a:latin typeface="HY엽서M" panose="02030600000101010101" pitchFamily="18" charset="-127"/>
+                <a:ea typeface="HY엽서M" panose="02030600000101010101" pitchFamily="18" charset="-127"/>
+              </a:rPr>
+              <a:t> </a:t>
+            </a:r>
+            <a:r>
+              <a:rPr lang="en-US" altLang="ko-KR" sz="1200" dirty="0">
+                <a:latin typeface="HY엽서M" panose="02030600000101010101" pitchFamily="18" charset="-127"/>
+                <a:ea typeface="HY엽서M" panose="02030600000101010101" pitchFamily="18" charset="-127"/>
+              </a:rPr>
+              <a:t>_______</a:t>
+            </a:r>
+            <a:r>
+              <a:rPr lang="ko-KR" altLang="en-US" sz="1200" dirty="0">
+                <a:latin typeface="HY엽서M" panose="02030600000101010101" pitchFamily="18" charset="-127"/>
+                <a:ea typeface="HY엽서M" panose="02030600000101010101" pitchFamily="18" charset="-127"/>
+              </a:rPr>
+              <a:t>일당 </a:t>
+            </a:r>
+            <a:r>
+              <a:rPr lang="en-US" altLang="ko-KR" sz="1200" dirty="0">
+                <a:latin typeface="HY엽서M" panose="02030600000101010101" pitchFamily="18" charset="-127"/>
+                <a:ea typeface="HY엽서M" panose="02030600000101010101" pitchFamily="18" charset="-127"/>
+              </a:rPr>
+              <a:t>:</a:t>
+            </a:r>
+          </a:p>
+          <a:p>
+            <a:r>
+              <a:rPr lang="en-US" altLang="ko-KR" sz="1200" dirty="0">
+                <a:latin typeface="HY엽서M" panose="02030600000101010101" pitchFamily="18" charset="-127"/>
+                <a:ea typeface="HY엽서M" panose="02030600000101010101" pitchFamily="18" charset="-127"/>
+              </a:rPr>
+              <a:t> </a:t>
+            </a:r>
+          </a:p>
+          <a:p>
+            <a:r>
+              <a:rPr lang="ko-KR" altLang="en-US" sz="1200" dirty="0">
+                <a:latin typeface="HY엽서M" panose="02030600000101010101" pitchFamily="18" charset="-127"/>
+                <a:ea typeface="HY엽서M" panose="02030600000101010101" pitchFamily="18" charset="-127"/>
+              </a:rPr>
+              <a:t>간병인일당 </a:t>
+            </a:r>
+            <a:r>
+              <a:rPr lang="en-US" altLang="ko-KR" sz="1200" dirty="0">
+                <a:latin typeface="HY엽서M" panose="02030600000101010101" pitchFamily="18" charset="-127"/>
+                <a:ea typeface="HY엽서M" panose="02030600000101010101" pitchFamily="18" charset="-127"/>
+              </a:rPr>
+              <a:t>:          / </a:t>
+            </a:r>
+            <a:r>
+              <a:rPr lang="ko-KR" altLang="en-US" sz="1200" dirty="0">
+                <a:latin typeface="HY엽서M" panose="02030600000101010101" pitchFamily="18" charset="-127"/>
+                <a:ea typeface="HY엽서M" panose="02030600000101010101" pitchFamily="18" charset="-127"/>
+              </a:rPr>
+              <a:t>요양병원 </a:t>
+            </a:r>
+            <a:r>
+              <a:rPr lang="en-US" altLang="ko-KR" sz="1200" dirty="0">
+                <a:latin typeface="HY엽서M" panose="02030600000101010101" pitchFamily="18" charset="-127"/>
+                <a:ea typeface="HY엽서M" panose="02030600000101010101" pitchFamily="18" charset="-127"/>
+              </a:rPr>
               <a:t>: </a:t>
             </a:r>
+          </a:p>
+          <a:p>
+            <a:r>
+              <a:rPr lang="ko-KR" altLang="en-US" sz="1200" dirty="0" err="1">
+                <a:latin typeface="HY엽서M" panose="02030600000101010101" pitchFamily="18" charset="-127"/>
+                <a:ea typeface="HY엽서M" panose="02030600000101010101" pitchFamily="18" charset="-127"/>
+              </a:rPr>
+              <a:t>간호통합병동일당</a:t>
+            </a:r>
             <a:r>
               <a:rPr lang="ko-KR" altLang="en-US" sz="1200" dirty="0">
                 <a:latin typeface="HY엽서M" panose="02030600000101010101" pitchFamily="18" charset="-127"/>
                 <a:ea typeface="HY엽서M" panose="02030600000101010101" pitchFamily="18" charset="-127"/>
               </a:rPr>
-              <a:t/>
+              <a:t> </a:t>
             </a:r>
             <a:r>
               <a:rPr lang="en-US" altLang="ko-KR" sz="1200" dirty="0">
                 <a:latin typeface="HY엽서M" panose="02030600000101010101" pitchFamily="18" charset="-127"/>
                 <a:ea typeface="HY엽서M" panose="02030600000101010101" pitchFamily="18" charset="-127"/>
               </a:rPr>
-              <a:t/>
-            </a:r>
-            <a:r>
-              <a:rPr lang="ko-KR" altLang="en-US" sz="1200" dirty="0">
-                <a:latin typeface="HY엽서M" panose="02030600000101010101" pitchFamily="18" charset="-127"/>
-                <a:ea typeface="HY엽서M" panose="02030600000101010101" pitchFamily="18" charset="-127"/>
-              </a:rPr>
-              <a:t/>
-            </a:r>
-            <a:r>
-              <a:rPr lang="en-US" altLang="ko-KR" sz="1200" dirty="0">
-                <a:latin typeface="HY엽서M" panose="02030600000101010101" pitchFamily="18" charset="-127"/>
-                <a:ea typeface="HY엽서M" panose="02030600000101010101" pitchFamily="18" charset="-127"/>
-              </a:rPr>
-              <a:t>   </a:t>
-            </a:r>
-          </a:p>
-          <a:p>
-            <a:r>
-              <a:rPr lang="ko-KR" altLang="en-US" sz="1200" dirty="0">
-                <a:latin typeface="HY엽서M" panose="02030600000101010101" pitchFamily="18" charset="-127"/>
-                <a:ea typeface="HY엽서M" panose="02030600000101010101" pitchFamily="18" charset="-127"/>
-              </a:rPr>
-              <a:t>상해일당 </a:t>
-            </a:r>
-            <a:r>
-              <a:rPr lang="en-US" altLang="ko-KR" sz="1200" dirty="0">
-                <a:latin typeface="HY엽서M" panose="02030600000101010101" pitchFamily="18" charset="-127"/>
-                <a:ea typeface="HY엽서M" panose="02030600000101010101" pitchFamily="18" charset="-127"/>
-              </a:rPr>
-              <a:t>: </a:t>
-            </a:r>
-            <a:r>
-              <a:rPr lang="ko-KR" altLang="en-US" sz="1200" dirty="0">
-                <a:latin typeface="HY엽서M" panose="02030600000101010101" pitchFamily="18" charset="-127"/>
-                <a:ea typeface="HY엽서M" panose="02030600000101010101" pitchFamily="18" charset="-127"/>
-              </a:rPr>
-              <a:t> </a:t>
-            </a:r>
-            <a:r>
-              <a:rPr lang="en-US" altLang="ko-KR" sz="1200" dirty="0">
-                <a:latin typeface="HY엽서M" panose="02030600000101010101" pitchFamily="18" charset="-127"/>
-                <a:ea typeface="HY엽서M" panose="02030600000101010101" pitchFamily="18" charset="-127"/>
-              </a:rPr>
-              <a:t>/ </a:t>
-            </a:r>
-            <a:r>
-              <a:rPr lang="ko-KR" altLang="en-US" sz="1200" dirty="0">
-                <a:latin typeface="HY엽서M" panose="02030600000101010101" pitchFamily="18" charset="-127"/>
-                <a:ea typeface="HY엽서M" panose="02030600000101010101" pitchFamily="18" charset="-127"/>
-              </a:rPr>
-              <a:t>상급병원일당 </a:t>
-            </a:r>
-            <a:r>
-              <a:rPr lang="en-US" altLang="ko-KR" sz="1200" dirty="0">
-                <a:latin typeface="HY엽서M" panose="02030600000101010101" pitchFamily="18" charset="-127"/>
-                <a:ea typeface="HY엽서M" panose="02030600000101010101" pitchFamily="18" charset="-127"/>
-              </a:rPr>
-              <a:t>: </a:t>
-            </a:r>
-            <a:r>
-              <a:rPr lang="ko-KR" altLang="en-US" sz="1200" dirty="0">
-                <a:latin typeface="HY엽서M" panose="02030600000101010101" pitchFamily="18" charset="-127"/>
-                <a:ea typeface="HY엽서M" panose="02030600000101010101" pitchFamily="18" charset="-127"/>
-              </a:rPr>
-              <a:t/>
-            </a:r>
-            <a:r>
-              <a:rPr lang="en-US" altLang="ko-KR" sz="1200" dirty="0">
-                <a:latin typeface="HY엽서M" panose="02030600000101010101" pitchFamily="18" charset="-127"/>
-                <a:ea typeface="HY엽서M" panose="02030600000101010101" pitchFamily="18" charset="-127"/>
-              </a:rPr>
-              <a:t/>
-            </a:r>
-            <a:r>
-              <a:rPr lang="ko-KR" altLang="en-US" sz="1200" dirty="0">
-                <a:latin typeface="HY엽서M" panose="02030600000101010101" pitchFamily="18" charset="-127"/>
-                <a:ea typeface="HY엽서M" panose="02030600000101010101" pitchFamily="18" charset="-127"/>
-              </a:rPr>
-              <a:t/>
-            </a:r>
-            <a:endParaRPr lang="en-US" altLang="ko-KR" sz="1200" dirty="0">
-              <a:latin typeface="HY엽서M" panose="02030600000101010101" pitchFamily="18" charset="-127"/>
-              <a:ea typeface="HY엽서M" panose="02030600000101010101" pitchFamily="18" charset="-127"/>
-            </a:endParaRPr>
-          </a:p>
-          <a:p>
-            <a:r>
-              <a:rPr lang="ko-KR" altLang="en-US" sz="1200" dirty="0" err="1">
-                <a:latin typeface="HY엽서M" panose="02030600000101010101" pitchFamily="18" charset="-127"/>
-                <a:ea typeface="HY엽서M" panose="02030600000101010101" pitchFamily="18" charset="-127"/>
-              </a:rPr>
-              <a:t>질병중환자실</a:t>
-            </a:r>
-            <a:r>
-              <a:rPr lang="ko-KR" altLang="en-US" sz="1200" dirty="0">
-                <a:latin typeface="HY엽서M" panose="02030600000101010101" pitchFamily="18" charset="-127"/>
-                <a:ea typeface="HY엽서M" panose="02030600000101010101" pitchFamily="18" charset="-127"/>
-              </a:rPr>
-              <a:t> </a:t>
-            </a:r>
-            <a:r>
-              <a:rPr lang="en-US" altLang="ko-KR" sz="1200" dirty="0">
-                <a:latin typeface="HY엽서M" panose="02030600000101010101" pitchFamily="18" charset="-127"/>
-                <a:ea typeface="HY엽서M" panose="02030600000101010101" pitchFamily="18" charset="-127"/>
-              </a:rPr>
-              <a:t>: </a:t>
-            </a:r>
-            <a:r>
-              <a:rPr lang="ko-KR" altLang="en-US" sz="1200" dirty="0">
-                <a:latin typeface="HY엽서M" panose="02030600000101010101" pitchFamily="18" charset="-127"/>
-                <a:ea typeface="HY엽서M" panose="02030600000101010101" pitchFamily="18" charset="-127"/>
-              </a:rPr>
-              <a:t> </a:t>
-            </a:r>
-            <a:r>
-              <a:rPr lang="en-US" altLang="ko-KR" sz="1200" dirty="0">
-                <a:latin typeface="HY엽서M" panose="02030600000101010101" pitchFamily="18" charset="-127"/>
-                <a:ea typeface="HY엽서M" panose="02030600000101010101" pitchFamily="18" charset="-127"/>
-              </a:rPr>
-              <a:t> / </a:t>
-            </a:r>
-            <a:r>
-              <a:rPr lang="ko-KR" altLang="en-US" sz="1200" dirty="0" err="1">
-                <a:latin typeface="HY엽서M" panose="02030600000101010101" pitchFamily="18" charset="-127"/>
-                <a:ea typeface="HY엽서M" panose="02030600000101010101" pitchFamily="18" charset="-127"/>
-              </a:rPr>
-              <a:t>상해중환자실</a:t>
-            </a:r>
-            <a:r>
-              <a:rPr lang="ko-KR" altLang="en-US" sz="1200" dirty="0">
-                <a:latin typeface="HY엽서M" panose="02030600000101010101" pitchFamily="18" charset="-127"/>
-                <a:ea typeface="HY엽서M" panose="02030600000101010101" pitchFamily="18" charset="-127"/>
-              </a:rPr>
-              <a:t> </a:t>
-            </a:r>
-            <a:r>
-              <a:rPr lang="en-US" altLang="ko-KR" sz="1200" dirty="0">
-                <a:latin typeface="HY엽서M" panose="02030600000101010101" pitchFamily="18" charset="-127"/>
-                <a:ea typeface="HY엽서M" panose="02030600000101010101" pitchFamily="18" charset="-127"/>
-              </a:rPr>
-              <a:t>: </a:t>
-            </a:r>
-            <a:r>
-              <a:rPr lang="ko-KR" altLang="en-US" sz="1200" dirty="0">
-                <a:latin typeface="HY엽서M" panose="02030600000101010101" pitchFamily="18" charset="-127"/>
-                <a:ea typeface="HY엽서M" panose="02030600000101010101" pitchFamily="18" charset="-127"/>
-              </a:rPr>
-              <a:t/>
-            </a:r>
-            <a:r>
-              <a:rPr lang="en-US" altLang="ko-KR" sz="1200" dirty="0">
-                <a:latin typeface="HY엽서M" panose="02030600000101010101" pitchFamily="18" charset="-127"/>
-                <a:ea typeface="HY엽서M" panose="02030600000101010101" pitchFamily="18" charset="-127"/>
-              </a:rPr>
-              <a:t> </a:t>
-            </a:r>
-          </a:p>
-          <a:p>
-            <a:r>
-              <a:rPr lang="en-US" altLang="ko-KR" sz="1200" dirty="0">
-                <a:latin typeface="HY엽서M" panose="02030600000101010101" pitchFamily="18" charset="-127"/>
-                <a:ea typeface="HY엽서M" panose="02030600000101010101" pitchFamily="18" charset="-127"/>
-              </a:rPr>
-              <a:t>1</a:t>
-            </a:r>
-            <a:r>
-              <a:rPr lang="ko-KR" altLang="en-US" sz="1200" dirty="0">
-                <a:latin typeface="HY엽서M" panose="02030600000101010101" pitchFamily="18" charset="-127"/>
-                <a:ea typeface="HY엽서M" panose="02030600000101010101" pitchFamily="18" charset="-127"/>
-              </a:rPr>
-              <a:t>인실 상급병원일당 </a:t>
-            </a:r>
-            <a:r>
-              <a:rPr lang="en-US" altLang="ko-KR" sz="1200" dirty="0">
-                <a:latin typeface="HY엽서M" panose="02030600000101010101" pitchFamily="18" charset="-127"/>
-                <a:ea typeface="HY엽서M" panose="02030600000101010101" pitchFamily="18" charset="-127"/>
-              </a:rPr>
-              <a:t>: </a:t>
-            </a:r>
-          </a:p>
-          <a:p>
-            <a:r>
-              <a:rPr lang="en-US" altLang="ko-KR" sz="1200" dirty="0">
-                <a:latin typeface="HY엽서M" panose="02030600000101010101" pitchFamily="18" charset="-127"/>
-                <a:ea typeface="HY엽서M" panose="02030600000101010101" pitchFamily="18" charset="-127"/>
-              </a:rPr>
-              <a:t>1</a:t>
-            </a:r>
-            <a:r>
-              <a:rPr lang="ko-KR" altLang="en-US" sz="1200" dirty="0">
-                <a:latin typeface="HY엽서M" panose="02030600000101010101" pitchFamily="18" charset="-127"/>
-                <a:ea typeface="HY엽서M" panose="02030600000101010101" pitchFamily="18" charset="-127"/>
-              </a:rPr>
-              <a:t>인실 종합병원일당 </a:t>
-            </a:r>
-            <a:r>
-              <a:rPr lang="en-US" altLang="ko-KR" sz="1200" dirty="0">
-                <a:latin typeface="HY엽서M" panose="02030600000101010101" pitchFamily="18" charset="-127"/>
-                <a:ea typeface="HY엽서M" panose="02030600000101010101" pitchFamily="18" charset="-127"/>
-              </a:rPr>
-              <a:t>: </a:t>
-            </a:r>
-          </a:p>
-          <a:p>
-            <a:r>
-              <a:rPr lang="ko-KR" altLang="en-US" sz="1200" dirty="0" err="1">
-                <a:latin typeface="HY엽서M" panose="02030600000101010101" pitchFamily="18" charset="-127"/>
-                <a:ea typeface="HY엽서M" panose="02030600000101010101" pitchFamily="18" charset="-127"/>
-              </a:rPr>
-              <a:t>암일당</a:t>
-            </a:r>
-            <a:r>
-              <a:rPr lang="ko-KR" altLang="en-US" sz="1200" dirty="0">
-                <a:latin typeface="HY엽서M" panose="02030600000101010101" pitchFamily="18" charset="-127"/>
-                <a:ea typeface="HY엽서M" panose="02030600000101010101" pitchFamily="18" charset="-127"/>
-              </a:rPr>
-              <a:t> </a:t>
-            </a:r>
-            <a:r>
-              <a:rPr lang="en-US" altLang="ko-KR" sz="1200" dirty="0">
-                <a:latin typeface="HY엽서M" panose="02030600000101010101" pitchFamily="18" charset="-127"/>
-                <a:ea typeface="HY엽서M" panose="02030600000101010101" pitchFamily="18" charset="-127"/>
-              </a:rPr>
-              <a:t>: </a:t>
-            </a:r>
-            <a:r>
-              <a:rPr lang="ko-KR" altLang="en-US" sz="1200" dirty="0">
-                <a:latin typeface="HY엽서M" panose="02030600000101010101" pitchFamily="18" charset="-127"/>
-                <a:ea typeface="HY엽서M" panose="02030600000101010101" pitchFamily="18" charset="-127"/>
-              </a:rPr>
-              <a:t/>
-            </a:r>
-            <a:r>
-              <a:rPr lang="en-US" altLang="ko-KR" sz="1200" dirty="0">
-                <a:latin typeface="HY엽서M" panose="02030600000101010101" pitchFamily="18" charset="-127"/>
-                <a:ea typeface="HY엽서M" panose="02030600000101010101" pitchFamily="18" charset="-127"/>
-              </a:rPr>
-              <a:t>   /</a:t>
-            </a:r>
-            <a:r>
-              <a:rPr lang="ko-KR" altLang="en-US" sz="1200" dirty="0">
-                <a:latin typeface="HY엽서M" panose="02030600000101010101" pitchFamily="18" charset="-127"/>
-                <a:ea typeface="HY엽서M" panose="02030600000101010101" pitchFamily="18" charset="-127"/>
-              </a:rPr>
-              <a:t> </a:t>
-            </a:r>
-            <a:r>
-              <a:rPr lang="en-US" altLang="ko-KR" sz="1200" dirty="0">
-                <a:latin typeface="HY엽서M" panose="02030600000101010101" pitchFamily="18" charset="-127"/>
-                <a:ea typeface="HY엽서M" panose="02030600000101010101" pitchFamily="18" charset="-127"/>
-              </a:rPr>
-              <a:t>_______</a:t>
-            </a:r>
-            <a:r>
-              <a:rPr lang="ko-KR" altLang="en-US" sz="1200" dirty="0">
-                <a:latin typeface="HY엽서M" panose="02030600000101010101" pitchFamily="18" charset="-127"/>
-                <a:ea typeface="HY엽서M" panose="02030600000101010101" pitchFamily="18" charset="-127"/>
-              </a:rPr>
-              <a:t>일당 </a:t>
-            </a:r>
-            <a:r>
-              <a:rPr lang="en-US" altLang="ko-KR" sz="1200" dirty="0">
-                <a:latin typeface="HY엽서M" panose="02030600000101010101" pitchFamily="18" charset="-127"/>
-                <a:ea typeface="HY엽서M" panose="02030600000101010101" pitchFamily="18" charset="-127"/>
-              </a:rPr>
-              <a:t>:</a:t>
-            </a:r>
-          </a:p>
-          <a:p>
-            <a:r>
-              <a:rPr lang="en-US" altLang="ko-KR" sz="1200" dirty="0">
-                <a:latin typeface="HY엽서M" panose="02030600000101010101" pitchFamily="18" charset="-127"/>
-                <a:ea typeface="HY엽서M" panose="02030600000101010101" pitchFamily="18" charset="-127"/>
-              </a:rPr>
-              <a:t> </a:t>
-            </a:r>
-          </a:p>
-          <a:p>
-            <a:r>
-              <a:rPr lang="ko-KR" altLang="en-US" sz="1200" dirty="0">
-                <a:latin typeface="HY엽서M" panose="02030600000101010101" pitchFamily="18" charset="-127"/>
-                <a:ea typeface="HY엽서M" panose="02030600000101010101" pitchFamily="18" charset="-127"/>
-              </a:rPr>
-              <a:t>간병인일당 </a:t>
-            </a:r>
-            <a:r>
-              <a:rPr lang="en-US" altLang="ko-KR" sz="1200" dirty="0">
-                <a:latin typeface="HY엽서M" panose="02030600000101010101" pitchFamily="18" charset="-127"/>
-                <a:ea typeface="HY엽서M" panose="02030600000101010101" pitchFamily="18" charset="-127"/>
-              </a:rPr>
-              <a:t>:          / </a:t>
-            </a:r>
-            <a:r>
-              <a:rPr lang="ko-KR" altLang="en-US" sz="1200" dirty="0">
-                <a:latin typeface="HY엽서M" panose="02030600000101010101" pitchFamily="18" charset="-127"/>
-                <a:ea typeface="HY엽서M" panose="02030600000101010101" pitchFamily="18" charset="-127"/>
-              </a:rPr>
-              <a:t>요양병원 </a:t>
-            </a:r>
-            <a:r>
-              <a:rPr lang="en-US" altLang="ko-KR" sz="1200" dirty="0">
-                <a:latin typeface="HY엽서M" panose="02030600000101010101" pitchFamily="18" charset="-127"/>
-                <a:ea typeface="HY엽서M" panose="02030600000101010101" pitchFamily="18" charset="-127"/>
-              </a:rPr>
-              <a:t>: </a:t>
-            </a:r>
-          </a:p>
-          <a:p>
-            <a:r>
-              <a:rPr lang="ko-KR" altLang="en-US" sz="1200" dirty="0" err="1">
-                <a:latin typeface="HY엽서M" panose="02030600000101010101" pitchFamily="18" charset="-127"/>
-                <a:ea typeface="HY엽서M" panose="02030600000101010101" pitchFamily="18" charset="-127"/>
-              </a:rPr>
-              <a:t>간호통합병동일당</a:t>
-            </a:r>
-            <a:r>
-              <a:rPr lang="ko-KR" altLang="en-US" sz="1200" dirty="0">
-                <a:latin typeface="HY엽서M" panose="02030600000101010101" pitchFamily="18" charset="-127"/>
-                <a:ea typeface="HY엽서M" panose="02030600000101010101" pitchFamily="18" charset="-127"/>
-              </a:rPr>
-              <a:t> </a:t>
-            </a:r>
-            <a:r>
-              <a:rPr lang="en-US" altLang="ko-KR" sz="1200" dirty="0">
-                <a:latin typeface="HY엽서M" panose="02030600000101010101" pitchFamily="18" charset="-127"/>
-                <a:ea typeface="HY엽서M" panose="02030600000101010101" pitchFamily="18" charset="-127"/>
-              </a:rPr>
               <a:t>:    </a:t>
-            </a:r>
-          </a:p>
-        </p:txBody>
-      </p:sp>
-      <p:sp>
-        <p:nvSpPr>
-          <p:cNvPr id="2" name="TextBox 1">
-            <a:extLst>
-              <a:ext uri="{FF2B5EF4-FFF2-40B4-BE49-F238E27FC236}">
-                <a16:creationId xmlns:a16="http://schemas.microsoft.com/office/drawing/2014/main" id="{1833FB17-06B0-1B04-0AB0-869230F3D310}"/>
-              </a:ext>
-            </a:extLst>
-          </p:cNvPr>
-          <p:cNvSpPr txBox="1"/>
-          <p:nvPr/>
-        </p:nvSpPr>
-        <p:spPr>
-          <a:xfrm>
-            <a:off x="622396" y="246844"/>
-            <a:ext cx="1253523" cy="461665"/>
-          </a:xfrm>
-          <a:prstGeom prst="rect">
-            <a:avLst/>
-          </a:prstGeom>
-          <a:noFill/>
-        </p:spPr>
-        <p:txBody>
-          <a:bodyPr wrap="square" rtlCol="0">
-            <a:spAutoFit/>
-          </a:bodyPr>
-          <a:lstStyle/>
-          <a:p>
-            <a:pPr algn="ctr"/>
-            <a:r>
-              <a:rPr lang="ko-KR" altLang="en-US" sz="2400" b="1" dirty="0" err="1"/>
-              <a:t/>
-            </a:r>
-            <a:endParaRPr lang="ko-KR" altLang="en-US" sz="2400" b="1" dirty="0"/>
-          </a:p>
-        </p:txBody>
-      </p:sp>
-      <p:sp>
-        <p:nvSpPr>
-          <p:cNvPr id="5" name="TextBox 4">
-            <a:extLst>
-              <a:ext uri="{FF2B5EF4-FFF2-40B4-BE49-F238E27FC236}">
-                <a16:creationId xmlns:a16="http://schemas.microsoft.com/office/drawing/2014/main" id="{3F51B681-15F9-9A68-3F91-D864B64303B7}"/>
-              </a:ext>
-            </a:extLst>
-          </p:cNvPr>
-          <p:cNvSpPr txBox="1"/>
-          <p:nvPr/>
-        </p:nvSpPr>
-        <p:spPr>
-          <a:xfrm>
-            <a:off x="2976352" y="279601"/>
-            <a:ext cx="473571" cy="400110"/>
-          </a:xfrm>
-          <a:prstGeom prst="rect">
-            <a:avLst/>
-          </a:prstGeom>
-          <a:noFill/>
-        </p:spPr>
-        <p:txBody>
-          <a:bodyPr wrap="square" rtlCol="0">
-            <a:spAutoFit/>
-          </a:bodyPr>
-          <a:lstStyle/>
-          <a:p>
-            <a:pPr algn="ctr"/>
-            <a:r>
-              <a:rPr lang="ko-KR" altLang="en-US" sz="2000" b="1" dirty="0"/>
-              <a:t>전</a:t>
-            </a:r>
-          </a:p>
-        </p:txBody>
-      </p:sp>
-      <p:sp>
-        <p:nvSpPr>
-          <p:cNvPr id="17" name="TextBox 16">
-            <a:extLst>
-              <a:ext uri="{FF2B5EF4-FFF2-40B4-BE49-F238E27FC236}">
-                <a16:creationId xmlns:a16="http://schemas.microsoft.com/office/drawing/2014/main" id="{A966D15A-0593-77E7-0BE1-9EBCC87E01E6}"/>
-              </a:ext>
-            </a:extLst>
-          </p:cNvPr>
-          <p:cNvSpPr txBox="1"/>
-          <p:nvPr/>
-        </p:nvSpPr>
-        <p:spPr>
-          <a:xfrm>
-            <a:off x="3785550" y="279601"/>
-            <a:ext cx="473571" cy="400110"/>
-          </a:xfrm>
-          <a:prstGeom prst="rect">
-            <a:avLst/>
-          </a:prstGeom>
-          <a:noFill/>
-        </p:spPr>
-        <p:txBody>
-          <a:bodyPr wrap="square" rtlCol="0">
-            <a:spAutoFit/>
-          </a:bodyPr>
-          <a:lstStyle/>
-          <a:p>
-            <a:pPr algn="ctr"/>
-            <a:r>
-              <a:rPr lang="en-US" altLang="ko-KR" sz="2000" b="1" dirty="0">
-                <a:solidFill>
-                  <a:srgbClr val="0000FF"/>
-                </a:solidFill>
-              </a:rPr>
-              <a:t/>
-            </a:r>
-            <a:endParaRPr lang="ko-KR" altLang="en-US" sz="2000" b="1" dirty="0">
-              <a:solidFill>
-                <a:srgbClr val="0000FF"/>
-              </a:solidFill>
-            </a:endParaRPr>
-          </a:p>
-        </p:txBody>
-      </p:sp>
-      <p:sp>
-        <p:nvSpPr>
-          <p:cNvPr id="25" name="TextBox 24">
-            <a:extLst>
-              <a:ext uri="{FF2B5EF4-FFF2-40B4-BE49-F238E27FC236}">
-                <a16:creationId xmlns:a16="http://schemas.microsoft.com/office/drawing/2014/main" id="{1404DB6D-7E71-1D6D-A9BE-FB15052FD48D}"/>
-              </a:ext>
-            </a:extLst>
-          </p:cNvPr>
-          <p:cNvSpPr txBox="1"/>
-          <p:nvPr/>
-        </p:nvSpPr>
-        <p:spPr>
-          <a:xfrm>
-            <a:off x="4464597" y="265529"/>
-            <a:ext cx="473571" cy="400110"/>
-          </a:xfrm>
-          <a:prstGeom prst="rect">
-            <a:avLst/>
-          </a:prstGeom>
-          <a:noFill/>
-        </p:spPr>
-        <p:txBody>
-          <a:bodyPr wrap="square" rtlCol="0">
-            <a:spAutoFit/>
-          </a:bodyPr>
-          <a:lstStyle/>
-          <a:p>
-            <a:pPr algn="ctr"/>
-            <a:r>
-              <a:rPr lang="en-US" altLang="ko-KR" sz="2000" b="1" dirty="0">
-                <a:solidFill>
-                  <a:srgbClr val="0000FF"/>
-                </a:solidFill>
-              </a:rPr>
-              <a:t/>
-            </a:r>
-            <a:endParaRPr lang="ko-KR" altLang="en-US" sz="2000" b="1" dirty="0">
-              <a:solidFill>
-                <a:srgbClr val="0000FF"/>
-              </a:solidFill>
-            </a:endParaRPr>
-          </a:p>
-        </p:txBody>
-      </p:sp>
-      <p:sp>
-        <p:nvSpPr>
-          <p:cNvPr id="26" name="TextBox 25">
-            <a:extLst>
-              <a:ext uri="{FF2B5EF4-FFF2-40B4-BE49-F238E27FC236}">
-                <a16:creationId xmlns:a16="http://schemas.microsoft.com/office/drawing/2014/main" id="{767D2A4B-55BA-F21D-2EED-F33BD6676E3F}"/>
-              </a:ext>
-            </a:extLst>
-          </p:cNvPr>
-          <p:cNvSpPr txBox="1"/>
-          <p:nvPr/>
-        </p:nvSpPr>
-        <p:spPr>
-          <a:xfrm>
-            <a:off x="5204025" y="265529"/>
-            <a:ext cx="473571" cy="400110"/>
-          </a:xfrm>
-          <a:prstGeom prst="rect">
-            <a:avLst/>
-          </a:prstGeom>
-          <a:noFill/>
-        </p:spPr>
-        <p:txBody>
-          <a:bodyPr wrap="square" rtlCol="0">
-            <a:spAutoFit/>
-          </a:bodyPr>
-          <a:lstStyle/>
-          <a:p>
-            <a:pPr algn="ctr"/>
-            <a:r>
-              <a:rPr lang="en-US" altLang="ko-KR" sz="2000" b="1" dirty="0">
-                <a:solidFill>
-                  <a:srgbClr val="0000FF"/>
-                </a:solidFill>
-              </a:rPr>
-              <a:t/>
-            </a:r>
-            <a:endParaRPr lang="ko-KR" altLang="en-US" sz="2000" b="1" dirty="0">
-              <a:solidFill>
-                <a:srgbClr val="0000FF"/>
-              </a:solidFill>
-            </a:endParaRPr>
-          </a:p>
-        </p:txBody>
-      </p:sp>
-      <p:sp>
-        <p:nvSpPr>
-          <p:cNvPr id="27" name="TextBox 26">
-            <a:extLst>
-              <a:ext uri="{FF2B5EF4-FFF2-40B4-BE49-F238E27FC236}">
-                <a16:creationId xmlns:a16="http://schemas.microsoft.com/office/drawing/2014/main" id="{F78FF67C-CE0E-1081-9F08-DB01D2C4DA76}"/>
-              </a:ext>
-            </a:extLst>
-          </p:cNvPr>
-          <p:cNvSpPr txBox="1"/>
-          <p:nvPr/>
-        </p:nvSpPr>
-        <p:spPr>
-          <a:xfrm>
-            <a:off x="1429550" y="1642462"/>
-            <a:ext cx="789387" cy="369332"/>
-          </a:xfrm>
-          <a:prstGeom prst="rect">
-            <a:avLst/>
-          </a:prstGeom>
-          <a:noFill/>
-        </p:spPr>
-        <p:txBody>
-          <a:bodyPr wrap="square" rtlCol="0">
-            <a:spAutoFit/>
-          </a:bodyPr>
-          <a:lstStyle/>
-          <a:p>
-            <a:r>
-              <a:rPr lang="en-US" altLang="ko-KR" dirty="0"/>
-              <a:t/>
-            </a:r>
-            <a:r>
-              <a:rPr lang="ko-KR" altLang="en-US" dirty="0"/>
-              <a:t/>
-            </a:r>
-          </a:p>
-        </p:txBody>
-      </p:sp>
-      <p:sp>
-        <p:nvSpPr>
-          <p:cNvPr id="32" name="TextBox 31">
-            <a:extLst>
-              <a:ext uri="{FF2B5EF4-FFF2-40B4-BE49-F238E27FC236}">
-                <a16:creationId xmlns:a16="http://schemas.microsoft.com/office/drawing/2014/main" id="{C69CAAD8-F3B0-3786-28F1-647CBF531F7C}"/>
-              </a:ext>
-            </a:extLst>
-          </p:cNvPr>
-          <p:cNvSpPr txBox="1"/>
-          <p:nvPr/>
-        </p:nvSpPr>
-        <p:spPr>
-          <a:xfrm>
-            <a:off x="4149432" y="1488753"/>
-            <a:ext cx="1940771" cy="461665"/>
-          </a:xfrm>
-          <a:prstGeom prst="rect">
-            <a:avLst/>
-          </a:prstGeom>
-          <a:noFill/>
-        </p:spPr>
-        <p:txBody>
-          <a:bodyPr wrap="square" rtlCol="0">
-            <a:spAutoFit/>
-          </a:bodyPr>
-          <a:lstStyle/>
-          <a:p>
-            <a:pPr algn="ctr"/>
-            <a:r>
-              <a:rPr lang="ko-KR" altLang="en-US" sz="1200" dirty="0"/>
-              <a:t/>
-            </a:r>
-            <a:r>
-              <a:rPr lang="en-US" altLang="ko-KR" sz="1200" dirty="0"/>
-              <a:t/>
-            </a:r>
-            <a:r>
-              <a:rPr lang="ko-KR" altLang="en-US" sz="1200" dirty="0"/>
-              <a:t/>
-            </a:r>
-            <a:r>
-              <a:rPr lang="en-US" altLang="ko-KR" sz="1200" dirty="0"/>
-              <a:t/>
-            </a:r>
-            <a:r>
-              <a:rPr lang="ko-KR" altLang="en-US" sz="1200" dirty="0" err="1"/>
-              <a:t/>
-            </a:r>
-            <a:r>
-              <a:rPr lang="ko-KR" altLang="en-US" sz="1200" dirty="0"/>
-              <a:t/>
-            </a:r>
-            <a:r>
-              <a:rPr lang="en-US" altLang="ko-KR" sz="1200" dirty="0"/>
-              <a:t/>
-            </a:r>
-            <a:r>
-              <a:rPr lang="ko-KR" altLang="en-US" sz="1200" dirty="0"/>
-              <a:t/>
-            </a:r>
-            <a:endParaRPr lang="en-US" altLang="ko-KR" sz="1200" dirty="0"/>
-          </a:p>
-          <a:p>
-            <a:pPr algn="ctr"/>
-            <a:r>
-              <a:rPr lang="ko-KR" altLang="en-US" sz="1200" dirty="0"/>
-              <a:t/>
-            </a:r>
-            <a:r>
-              <a:rPr lang="en-US" altLang="ko-KR" sz="1200" dirty="0"/>
-              <a:t/>
-            </a:r>
-            <a:r>
-              <a:rPr lang="en-US" altLang="ko-KR" sz="1200" b="1" dirty="0">
-                <a:solidFill>
-                  <a:srgbClr val="0000FF"/>
-                </a:solidFill>
-              </a:rPr>
-              <a:t/>
-            </a:r>
-            <a:endParaRPr lang="ko-KR" altLang="en-US" sz="1200" b="1" dirty="0">
-              <a:solidFill>
-                <a:srgbClr val="0000FF"/>
-              </a:solidFill>
-            </a:endParaRPr>
-          </a:p>
-        </p:txBody>
-      </p:sp>
-      <p:sp>
-        <p:nvSpPr>
-          <p:cNvPr id="33" name="TextBox 32">
-            <a:extLst>
-              <a:ext uri="{FF2B5EF4-FFF2-40B4-BE49-F238E27FC236}">
-                <a16:creationId xmlns:a16="http://schemas.microsoft.com/office/drawing/2014/main" id="{D48BB11F-1B2E-F498-95D5-DB8C8A32D352}"/>
-              </a:ext>
-            </a:extLst>
-          </p:cNvPr>
-          <p:cNvSpPr txBox="1"/>
-          <p:nvPr/>
-        </p:nvSpPr>
-        <p:spPr>
-          <a:xfrm>
-            <a:off x="4888209" y="2609112"/>
-            <a:ext cx="789387" cy="369332"/>
-          </a:xfrm>
-          <a:prstGeom prst="rect">
-            <a:avLst/>
-          </a:prstGeom>
-          <a:noFill/>
-        </p:spPr>
-        <p:txBody>
-          <a:bodyPr wrap="square" rtlCol="0">
-            <a:spAutoFit/>
-          </a:bodyPr>
-          <a:lstStyle/>
-          <a:p>
-            <a:r>
-              <a:rPr lang="en-US" altLang="ko-KR" dirty="0"/>
-              <a:t/>
-            </a:r>
-            <a:r>
-              <a:rPr lang="ko-KR" altLang="en-US" dirty="0"/>
-              <a:t/>
             </a:r>
           </a:p>
         </p:txBody>
